--- a/CharteSlide.pptx
+++ b/CharteSlide.pptx
@@ -71,34 +71,7 @@
                 </a:solidFill>
                 <a:latin typeface="Arial"/>
               </a:rPr>
-              <a:t>Cliquez </a:t>
-            </a:r>
-            <a:r>
-              <a:rPr b="0" lang="fr-FR" sz="4400" spc="-1" strike="noStrike">
-                <a:solidFill>
-                  <a:srgbClr val="000000"/>
-                </a:solidFill>
-                <a:latin typeface="Arial"/>
-              </a:rPr>
-              <a:t>pour </a:t>
-            </a:r>
-            <a:r>
-              <a:rPr b="0" lang="fr-FR" sz="4400" spc="-1" strike="noStrike">
-                <a:solidFill>
-                  <a:srgbClr val="000000"/>
-                </a:solidFill>
-                <a:latin typeface="Arial"/>
-              </a:rPr>
-              <a:t>déplacer </a:t>
-            </a:r>
-            <a:r>
-              <a:rPr b="0" lang="fr-FR" sz="4400" spc="-1" strike="noStrike">
-                <a:solidFill>
-                  <a:srgbClr val="000000"/>
-                </a:solidFill>
-                <a:latin typeface="Arial"/>
-              </a:rPr>
-              <a:t>la diapo</a:t>
+              <a:t>Cliquez pour déplacer la diapo</a:t>
             </a:r>
             <a:endParaRPr b="0" lang="fr-FR" sz="4400" spc="-1" strike="noStrike">
               <a:solidFill>
@@ -147,34 +120,7 @@
                 </a:solidFill>
                 <a:latin typeface="Arial"/>
               </a:rPr>
-              <a:t>Cliquez pour </a:t>
-            </a:r>
-            <a:r>
-              <a:rPr b="0" lang="fr-FR" sz="2000" spc="-1" strike="noStrike">
-                <a:solidFill>
-                  <a:srgbClr val="000000"/>
-                </a:solidFill>
-                <a:latin typeface="Arial"/>
-              </a:rPr>
-              <a:t>modifier le </a:t>
-            </a:r>
-            <a:r>
-              <a:rPr b="0" lang="fr-FR" sz="2000" spc="-1" strike="noStrike">
-                <a:solidFill>
-                  <a:srgbClr val="000000"/>
-                </a:solidFill>
-                <a:latin typeface="Arial"/>
-              </a:rPr>
-              <a:t>format des </a:t>
-            </a:r>
-            <a:r>
-              <a:rPr b="0" lang="fr-FR" sz="2000" spc="-1" strike="noStrike">
-                <a:solidFill>
-                  <a:srgbClr val="000000"/>
-                </a:solidFill>
-                <a:latin typeface="Arial"/>
-              </a:rPr>
-              <a:t>notes</a:t>
+              <a:t>Cliquez pour modifier le format des notes</a:t>
             </a:r>
             <a:endParaRPr b="0" lang="fr-FR" sz="2000" spc="-1" strike="noStrike">
               <a:solidFill>
@@ -396,7 +342,7 @@
             <a:pPr indent="0" algn="r">
               <a:buNone/>
             </a:pPr>
-            <a:fld id="{B5BD8F5D-AC8D-43E6-B5B0-DE8D3C9A25D9}" type="slidenum">
+            <a:fld id="{E2809E40-7AA3-4EB5-B541-0686C83F5F6B}" type="slidenum">
               <a:rPr b="0" lang="fr-FR" sz="1400" spc="-1" strike="noStrike">
                 <a:solidFill>
                   <a:srgbClr val="000000"/>
@@ -439,7 +385,7 @@
       </p:grpSpPr>
       <p:sp>
         <p:nvSpPr>
-          <p:cNvPr id="103" name="PlaceHolder 1"/>
+          <p:cNvPr id="104" name="PlaceHolder 1"/>
           <p:cNvSpPr>
             <a:spLocks noGrp="1"/>
           </p:cNvSpPr>
@@ -450,19 +396,19 @@
         <p:spPr>
           <a:xfrm>
             <a:off x="685800" y="1143000"/>
-            <a:ext cx="5485320" cy="3085200"/>
-          </a:xfrm>
-          <a:prstGeom prst="rect">
-            <a:avLst/>
-          </a:prstGeom>
-          <a:ln w="0">
-            <a:noFill/>
-          </a:ln>
-        </p:spPr>
-      </p:sp>
-      <p:sp>
-        <p:nvSpPr>
-          <p:cNvPr id="104" name="PlaceHolder 2"/>
+            <a:ext cx="5484600" cy="3084480"/>
+          </a:xfrm>
+          <a:prstGeom prst="rect">
+            <a:avLst/>
+          </a:prstGeom>
+          <a:ln w="0">
+            <a:noFill/>
+          </a:ln>
+        </p:spPr>
+      </p:sp>
+      <p:sp>
+        <p:nvSpPr>
+          <p:cNvPr id="105" name="PlaceHolder 2"/>
           <p:cNvSpPr>
             <a:spLocks noGrp="1"/>
           </p:cNvSpPr>
@@ -473,7 +419,7 @@
         <p:spPr>
           <a:xfrm>
             <a:off x="685800" y="4400640"/>
-            <a:ext cx="5485320" cy="3599280"/>
+            <a:ext cx="5484600" cy="3598560"/>
           </a:xfrm>
           <a:prstGeom prst="rect">
             <a:avLst/>
@@ -502,7 +448,7 @@
       </p:sp>
       <p:sp>
         <p:nvSpPr>
-          <p:cNvPr id="105" name="PlaceHolder 3"/>
+          <p:cNvPr id="106" name="PlaceHolder 3"/>
           <p:cNvSpPr>
             <a:spLocks noGrp="1"/>
           </p:cNvSpPr>
@@ -513,7 +459,7 @@
         <p:spPr>
           <a:xfrm>
             <a:off x="3884760" y="8685360"/>
-            <a:ext cx="2970720" cy="457560"/>
+            <a:ext cx="2970000" cy="456840"/>
           </a:xfrm>
           <a:prstGeom prst="rect">
             <a:avLst/>
@@ -555,7 +501,7 @@
                 <a:tab algn="l" pos="0"/>
               </a:tabLst>
             </a:pPr>
-            <a:fld id="{902E559A-B141-4DEF-9DEA-719F11F4A548}" type="slidenum">
+            <a:fld id="{974BCCCE-4535-4974-AB30-8F4C7F1747E7}" type="slidenum">
               <a:rPr b="0" lang="en-US" sz="1200" spc="-1" strike="noStrike">
                 <a:solidFill>
                   <a:schemeClr val="dk1"/>
@@ -598,7 +544,7 @@
       </p:grpSpPr>
       <p:sp>
         <p:nvSpPr>
-          <p:cNvPr id="106" name="PlaceHolder 1"/>
+          <p:cNvPr id="107" name="PlaceHolder 1"/>
           <p:cNvSpPr>
             <a:spLocks noGrp="1"/>
           </p:cNvSpPr>
@@ -609,19 +555,19 @@
         <p:spPr>
           <a:xfrm>
             <a:off x="685800" y="1143000"/>
-            <a:ext cx="5485320" cy="3085200"/>
-          </a:xfrm>
-          <a:prstGeom prst="rect">
-            <a:avLst/>
-          </a:prstGeom>
-          <a:ln w="0">
-            <a:noFill/>
-          </a:ln>
-        </p:spPr>
-      </p:sp>
-      <p:sp>
-        <p:nvSpPr>
-          <p:cNvPr id="107" name="PlaceHolder 2"/>
+            <a:ext cx="5485680" cy="3085560"/>
+          </a:xfrm>
+          <a:prstGeom prst="rect">
+            <a:avLst/>
+          </a:prstGeom>
+          <a:ln w="0">
+            <a:noFill/>
+          </a:ln>
+        </p:spPr>
+      </p:sp>
+      <p:sp>
+        <p:nvSpPr>
+          <p:cNvPr id="108" name="PlaceHolder 2"/>
           <p:cNvSpPr>
             <a:spLocks noGrp="1"/>
           </p:cNvSpPr>
@@ -632,7 +578,7 @@
         <p:spPr>
           <a:xfrm>
             <a:off x="685800" y="4400640"/>
-            <a:ext cx="5485320" cy="3599280"/>
+            <a:ext cx="5485680" cy="3599640"/>
           </a:xfrm>
           <a:prstGeom prst="rect">
             <a:avLst/>
@@ -661,7 +607,7 @@
       </p:sp>
       <p:sp>
         <p:nvSpPr>
-          <p:cNvPr id="108" name="PlaceHolder 3"/>
+          <p:cNvPr id="109" name="PlaceHolder 3"/>
           <p:cNvSpPr>
             <a:spLocks noGrp="1"/>
           </p:cNvSpPr>
@@ -672,7 +618,7 @@
         <p:spPr>
           <a:xfrm>
             <a:off x="3884760" y="8685360"/>
-            <a:ext cx="2970720" cy="457560"/>
+            <a:ext cx="2971080" cy="457920"/>
           </a:xfrm>
           <a:prstGeom prst="rect">
             <a:avLst/>
@@ -714,7 +660,7 @@
                 <a:tab algn="l" pos="0"/>
               </a:tabLst>
             </a:pPr>
-            <a:fld id="{77D491F8-FD66-4B8B-B4C9-8B142C446134}" type="slidenum">
+            <a:fld id="{D2C6B5BA-B36E-4738-9039-797827AA349F}" type="slidenum">
               <a:rPr b="0" lang="en-US" sz="1200" spc="-1" strike="noStrike">
                 <a:solidFill>
                   <a:schemeClr val="dk1"/>
@@ -757,7 +703,7 @@
       </p:grpSpPr>
       <p:sp>
         <p:nvSpPr>
-          <p:cNvPr id="109" name="PlaceHolder 1"/>
+          <p:cNvPr id="110" name="PlaceHolder 1"/>
           <p:cNvSpPr>
             <a:spLocks noGrp="1"/>
           </p:cNvSpPr>
@@ -768,19 +714,19 @@
         <p:spPr>
           <a:xfrm>
             <a:off x="685800" y="1143000"/>
-            <a:ext cx="5485320" cy="3085200"/>
-          </a:xfrm>
-          <a:prstGeom prst="rect">
-            <a:avLst/>
-          </a:prstGeom>
-          <a:ln w="0">
-            <a:noFill/>
-          </a:ln>
-        </p:spPr>
-      </p:sp>
-      <p:sp>
-        <p:nvSpPr>
-          <p:cNvPr id="110" name="PlaceHolder 2"/>
+            <a:ext cx="5484600" cy="3084480"/>
+          </a:xfrm>
+          <a:prstGeom prst="rect">
+            <a:avLst/>
+          </a:prstGeom>
+          <a:ln w="0">
+            <a:noFill/>
+          </a:ln>
+        </p:spPr>
+      </p:sp>
+      <p:sp>
+        <p:nvSpPr>
+          <p:cNvPr id="111" name="PlaceHolder 2"/>
           <p:cNvSpPr>
             <a:spLocks noGrp="1"/>
           </p:cNvSpPr>
@@ -791,7 +737,7 @@
         <p:spPr>
           <a:xfrm>
             <a:off x="685800" y="4400640"/>
-            <a:ext cx="5485320" cy="3599280"/>
+            <a:ext cx="5484600" cy="3598560"/>
           </a:xfrm>
           <a:prstGeom prst="rect">
             <a:avLst/>
@@ -820,7 +766,7 @@
       </p:sp>
       <p:sp>
         <p:nvSpPr>
-          <p:cNvPr id="111" name="PlaceHolder 3"/>
+          <p:cNvPr id="112" name="PlaceHolder 3"/>
           <p:cNvSpPr>
             <a:spLocks noGrp="1"/>
           </p:cNvSpPr>
@@ -831,7 +777,7 @@
         <p:spPr>
           <a:xfrm>
             <a:off x="3884760" y="8685360"/>
-            <a:ext cx="2970720" cy="457560"/>
+            <a:ext cx="2970000" cy="456840"/>
           </a:xfrm>
           <a:prstGeom prst="rect">
             <a:avLst/>
@@ -873,7 +819,7 @@
                 <a:tab algn="l" pos="0"/>
               </a:tabLst>
             </a:pPr>
-            <a:fld id="{A1BD4DFC-46FD-41C0-90DD-603920148F7F}" type="slidenum">
+            <a:fld id="{08B76309-6DD9-4EEA-94D1-4BB39E8D5BC5}" type="slidenum">
               <a:rPr b="0" lang="en-US" sz="1200" spc="-1" strike="noStrike">
                 <a:solidFill>
                   <a:schemeClr val="dk1"/>
@@ -916,7 +862,7 @@
       </p:grpSpPr>
       <p:sp>
         <p:nvSpPr>
-          <p:cNvPr id="112" name="PlaceHolder 1"/>
+          <p:cNvPr id="113" name="PlaceHolder 1"/>
           <p:cNvSpPr>
             <a:spLocks noGrp="1"/>
           </p:cNvSpPr>
@@ -927,19 +873,19 @@
         <p:spPr>
           <a:xfrm>
             <a:off x="685800" y="1143000"/>
-            <a:ext cx="5485320" cy="3085200"/>
-          </a:xfrm>
-          <a:prstGeom prst="rect">
-            <a:avLst/>
-          </a:prstGeom>
-          <a:ln w="0">
-            <a:noFill/>
-          </a:ln>
-        </p:spPr>
-      </p:sp>
-      <p:sp>
-        <p:nvSpPr>
-          <p:cNvPr id="113" name="PlaceHolder 2"/>
+            <a:ext cx="5484600" cy="3084480"/>
+          </a:xfrm>
+          <a:prstGeom prst="rect">
+            <a:avLst/>
+          </a:prstGeom>
+          <a:ln w="0">
+            <a:noFill/>
+          </a:ln>
+        </p:spPr>
+      </p:sp>
+      <p:sp>
+        <p:nvSpPr>
+          <p:cNvPr id="114" name="PlaceHolder 2"/>
           <p:cNvSpPr>
             <a:spLocks noGrp="1"/>
           </p:cNvSpPr>
@@ -950,7 +896,7 @@
         <p:spPr>
           <a:xfrm>
             <a:off x="685800" y="4400640"/>
-            <a:ext cx="5485320" cy="3599280"/>
+            <a:ext cx="5484600" cy="3598560"/>
           </a:xfrm>
           <a:prstGeom prst="rect">
             <a:avLst/>
@@ -979,7 +925,7 @@
       </p:sp>
       <p:sp>
         <p:nvSpPr>
-          <p:cNvPr id="114" name="PlaceHolder 3"/>
+          <p:cNvPr id="115" name="PlaceHolder 3"/>
           <p:cNvSpPr>
             <a:spLocks noGrp="1"/>
           </p:cNvSpPr>
@@ -990,7 +936,7 @@
         <p:spPr>
           <a:xfrm>
             <a:off x="3884760" y="8685360"/>
-            <a:ext cx="2970720" cy="457560"/>
+            <a:ext cx="2970000" cy="456840"/>
           </a:xfrm>
           <a:prstGeom prst="rect">
             <a:avLst/>
@@ -1032,7 +978,7 @@
                 <a:tab algn="l" pos="0"/>
               </a:tabLst>
             </a:pPr>
-            <a:fld id="{F26A1F08-A430-49FA-A882-83E86D6575C1}" type="slidenum">
+            <a:fld id="{80EB9358-A7A6-426B-B8FE-7C8A1E60DEDD}" type="slidenum">
               <a:rPr b="0" lang="en-US" sz="1200" spc="-1" strike="noStrike">
                 <a:solidFill>
                   <a:schemeClr val="dk1"/>
@@ -1140,7 +1086,7 @@
                 </a:solidFill>
                 <a:latin typeface="Arial"/>
               </a:rPr>
-              <a:t>Cliquez pour éditer le format du </a:t>
+              <a:t>Cliq</a:t>
             </a:r>
             <a:r>
               <a:rPr b="0" lang="fr-FR" sz="4400" spc="-1" strike="noStrike">
@@ -1149,7 +1095,106 @@
                 </a:solidFill>
                 <a:latin typeface="Arial"/>
               </a:rPr>
-              <a:t>texte-titre</a:t>
+              <a:t>uez </a:t>
+            </a:r>
+            <a:r>
+              <a:rPr b="0" lang="fr-FR" sz="4400" spc="-1" strike="noStrike">
+                <a:solidFill>
+                  <a:srgbClr val="000000"/>
+                </a:solidFill>
+                <a:latin typeface="Arial"/>
+              </a:rPr>
+              <a:t>pou</a:t>
+            </a:r>
+            <a:r>
+              <a:rPr b="0" lang="fr-FR" sz="4400" spc="-1" strike="noStrike">
+                <a:solidFill>
+                  <a:srgbClr val="000000"/>
+                </a:solidFill>
+                <a:latin typeface="Arial"/>
+              </a:rPr>
+              <a:t>r </a:t>
+            </a:r>
+            <a:r>
+              <a:rPr b="0" lang="fr-FR" sz="4400" spc="-1" strike="noStrike">
+                <a:solidFill>
+                  <a:srgbClr val="000000"/>
+                </a:solidFill>
+                <a:latin typeface="Arial"/>
+              </a:rPr>
+              <a:t>édit</a:t>
+            </a:r>
+            <a:r>
+              <a:rPr b="0" lang="fr-FR" sz="4400" spc="-1" strike="noStrike">
+                <a:solidFill>
+                  <a:srgbClr val="000000"/>
+                </a:solidFill>
+                <a:latin typeface="Arial"/>
+              </a:rPr>
+              <a:t>er </a:t>
+            </a:r>
+            <a:r>
+              <a:rPr b="0" lang="fr-FR" sz="4400" spc="-1" strike="noStrike">
+                <a:solidFill>
+                  <a:srgbClr val="000000"/>
+                </a:solidFill>
+                <a:latin typeface="Arial"/>
+              </a:rPr>
+              <a:t>le </a:t>
+            </a:r>
+            <a:r>
+              <a:rPr b="0" lang="fr-FR" sz="4400" spc="-1" strike="noStrike">
+                <a:solidFill>
+                  <a:srgbClr val="000000"/>
+                </a:solidFill>
+                <a:latin typeface="Arial"/>
+              </a:rPr>
+              <a:t>for</a:t>
+            </a:r>
+            <a:r>
+              <a:rPr b="0" lang="fr-FR" sz="4400" spc="-1" strike="noStrike">
+                <a:solidFill>
+                  <a:srgbClr val="000000"/>
+                </a:solidFill>
+                <a:latin typeface="Arial"/>
+              </a:rPr>
+              <a:t>mat </a:t>
+            </a:r>
+            <a:r>
+              <a:rPr b="0" lang="fr-FR" sz="4400" spc="-1" strike="noStrike">
+                <a:solidFill>
+                  <a:srgbClr val="000000"/>
+                </a:solidFill>
+                <a:latin typeface="Arial"/>
+              </a:rPr>
+              <a:t>du </a:t>
+            </a:r>
+            <a:r>
+              <a:rPr b="0" lang="fr-FR" sz="4400" spc="-1" strike="noStrike">
+                <a:solidFill>
+                  <a:srgbClr val="000000"/>
+                </a:solidFill>
+                <a:latin typeface="Arial"/>
+              </a:rPr>
+              <a:t>text</a:t>
+            </a:r>
+            <a:r>
+              <a:rPr b="0" lang="fr-FR" sz="4400" spc="-1" strike="noStrike">
+                <a:solidFill>
+                  <a:srgbClr val="000000"/>
+                </a:solidFill>
+                <a:latin typeface="Arial"/>
+              </a:rPr>
+              <a:t>e-</a:t>
+            </a:r>
+            <a:r>
+              <a:rPr b="0" lang="fr-FR" sz="4400" spc="-1" strike="noStrike">
+                <a:solidFill>
+                  <a:srgbClr val="000000"/>
+                </a:solidFill>
+                <a:latin typeface="Arial"/>
+              </a:rPr>
+              <a:t>titre</a:t>
             </a:r>
             <a:endParaRPr b="0" lang="fr-FR" sz="4400" spc="-1" strike="noStrike">
               <a:solidFill>
@@ -1427,7 +1472,7 @@
         <p:spPr>
           <a:xfrm>
             <a:off x="0" y="0"/>
-            <a:ext cx="9142920" cy="821880"/>
+            <a:ext cx="9142200" cy="821160"/>
           </a:xfrm>
           <a:prstGeom prst="rect">
             <a:avLst/>
@@ -1476,7 +1521,7 @@
         <p:spPr>
           <a:xfrm>
             <a:off x="0" y="0"/>
-            <a:ext cx="9142920" cy="72000"/>
+            <a:ext cx="9142200" cy="71280"/>
           </a:xfrm>
           <a:prstGeom prst="rect">
             <a:avLst/>
@@ -1525,7 +1570,7 @@
         <p:spPr>
           <a:xfrm>
             <a:off x="457200" y="960120"/>
-            <a:ext cx="8228520" cy="1004760"/>
+            <a:ext cx="8227800" cy="1004040"/>
           </a:xfrm>
           <a:prstGeom prst="rect">
             <a:avLst/>
@@ -1582,7 +1627,7 @@
         <p:spPr>
           <a:xfrm>
             <a:off x="457200" y="1874520"/>
-            <a:ext cx="8228520" cy="501840"/>
+            <a:ext cx="8227800" cy="501120"/>
           </a:xfrm>
           <a:prstGeom prst="rect">
             <a:avLst/>
@@ -1639,7 +1684,7 @@
         <p:spPr>
           <a:xfrm>
             <a:off x="2743200" y="2514600"/>
-            <a:ext cx="3656520" cy="44640"/>
+            <a:ext cx="3655800" cy="43920"/>
           </a:xfrm>
           <a:prstGeom prst="rect">
             <a:avLst/>
@@ -1688,7 +1733,7 @@
         <p:spPr>
           <a:xfrm>
             <a:off x="457200" y="2834640"/>
-            <a:ext cx="8228520" cy="364680"/>
+            <a:ext cx="8227800" cy="363960"/>
           </a:xfrm>
           <a:prstGeom prst="rect">
             <a:avLst/>
@@ -1745,7 +1790,7 @@
         <p:spPr>
           <a:xfrm>
             <a:off x="457200" y="3218760"/>
-            <a:ext cx="8228520" cy="318960"/>
+            <a:ext cx="8227800" cy="318240"/>
           </a:xfrm>
           <a:prstGeom prst="rect">
             <a:avLst/>
@@ -1802,7 +1847,7 @@
         <p:spPr>
           <a:xfrm>
             <a:off x="182880" y="4069080"/>
-            <a:ext cx="2147760" cy="657360"/>
+            <a:ext cx="2147040" cy="656640"/>
           </a:xfrm>
           <a:prstGeom prst="rect">
             <a:avLst/>
@@ -1851,7 +1896,7 @@
         <p:spPr>
           <a:xfrm>
             <a:off x="228600" y="4069080"/>
-            <a:ext cx="2056320" cy="657360"/>
+            <a:ext cx="2055600" cy="656640"/>
           </a:xfrm>
           <a:prstGeom prst="rect">
             <a:avLst/>
@@ -1908,7 +1953,7 @@
         <p:spPr>
           <a:xfrm>
             <a:off x="2468880" y="4069080"/>
-            <a:ext cx="2147760" cy="657360"/>
+            <a:ext cx="2147040" cy="656640"/>
           </a:xfrm>
           <a:prstGeom prst="rect">
             <a:avLst/>
@@ -1957,7 +2002,7 @@
         <p:spPr>
           <a:xfrm>
             <a:off x="2514600" y="4069080"/>
-            <a:ext cx="2056320" cy="657360"/>
+            <a:ext cx="2055600" cy="656640"/>
           </a:xfrm>
           <a:prstGeom prst="rect">
             <a:avLst/>
@@ -2014,7 +2059,7 @@
         <p:spPr>
           <a:xfrm>
             <a:off x="4754880" y="4069080"/>
-            <a:ext cx="2147760" cy="657360"/>
+            <a:ext cx="2147040" cy="656640"/>
           </a:xfrm>
           <a:prstGeom prst="rect">
             <a:avLst/>
@@ -2063,7 +2108,7 @@
         <p:spPr>
           <a:xfrm>
             <a:off x="4800600" y="4069080"/>
-            <a:ext cx="2056320" cy="657360"/>
+            <a:ext cx="2055600" cy="656640"/>
           </a:xfrm>
           <a:prstGeom prst="rect">
             <a:avLst/>
@@ -2120,7 +2165,7 @@
         <p:spPr>
           <a:xfrm>
             <a:off x="6995160" y="4069080"/>
-            <a:ext cx="1964880" cy="657360"/>
+            <a:ext cx="1964160" cy="656640"/>
           </a:xfrm>
           <a:prstGeom prst="rect">
             <a:avLst/>
@@ -2169,7 +2214,7 @@
         <p:spPr>
           <a:xfrm>
             <a:off x="7040880" y="4069080"/>
-            <a:ext cx="1873440" cy="657360"/>
+            <a:ext cx="1872720" cy="656640"/>
           </a:xfrm>
           <a:prstGeom prst="rect">
             <a:avLst/>
@@ -2226,7 +2271,7 @@
         <p:spPr>
           <a:xfrm>
             <a:off x="0" y="4818960"/>
-            <a:ext cx="9142920" cy="318960"/>
+            <a:ext cx="9142200" cy="318240"/>
           </a:xfrm>
           <a:prstGeom prst="rect">
             <a:avLst/>
@@ -2293,7 +2338,7 @@
     <p:bg>
       <p:bgPr>
         <a:solidFill>
-          <a:srgbClr val="1a1a1a"/>
+          <a:srgbClr val="00576b"/>
         </a:solidFill>
       </p:bgPr>
     </p:bg>
@@ -2313,26 +2358,23 @@
       </p:grpSpPr>
       <p:sp>
         <p:nvSpPr>
-          <p:cNvPr id="24" name="Shape 0"/>
+          <p:cNvPr id="24" name="Shape 905"/>
           <p:cNvSpPr/>
           <p:nvPr/>
         </p:nvSpPr>
         <p:spPr>
           <a:xfrm>
             <a:off x="0" y="0"/>
-            <a:ext cx="163440" cy="5146920"/>
+            <a:ext cx="163800" cy="5142960"/>
           </a:xfrm>
           <a:prstGeom prst="rect">
             <a:avLst/>
           </a:prstGeom>
           <a:solidFill>
-            <a:srgbClr val="e8834a"/>
+            <a:srgbClr val="007a8a"/>
           </a:solidFill>
-          <a:ln w="12700">
-            <a:solidFill>
-              <a:srgbClr val="e8834a"/>
-            </a:solidFill>
-            <a:round/>
+          <a:ln w="0">
+            <a:noFill/>
           </a:ln>
         </p:spPr>
         <p:style>
@@ -2362,14 +2404,14 @@
       </p:sp>
       <p:sp>
         <p:nvSpPr>
-          <p:cNvPr id="25" name="Text 1"/>
-          <p:cNvSpPr/>
-          <p:nvPr/>
-        </p:nvSpPr>
-        <p:spPr>
-          <a:xfrm>
-            <a:off x="411480" y="1645920"/>
-            <a:ext cx="8319960" cy="1004760"/>
+          <p:cNvPr id="25" name="Text 7"/>
+          <p:cNvSpPr/>
+          <p:nvPr/>
+        </p:nvSpPr>
+        <p:spPr>
+          <a:xfrm>
+            <a:off x="457200" y="731520"/>
+            <a:ext cx="7314480" cy="639360"/>
           </a:xfrm>
           <a:prstGeom prst="rect">
             <a:avLst/>
@@ -2386,7 +2428,7 @@
           <a:fontRef idx="minor"/>
         </p:style>
         <p:txBody>
-          <a:bodyPr lIns="0" rIns="0" tIns="0" bIns="0" anchor="ctr">
+          <a:bodyPr lIns="90000" rIns="90000" tIns="45000" bIns="45000" anchor="ctr">
             <a:noAutofit/>
           </a:bodyPr>
           <a:p>
@@ -2399,16 +2441,16 @@
               </a:tabLst>
             </a:pPr>
             <a:r>
-              <a:rPr b="1" lang="en-US" sz="3800" spc="-1" strike="noStrike">
-                <a:solidFill>
-                  <a:srgbClr val="ffffff"/>
+              <a:rPr b="1" lang="en-US" sz="2000" spc="-1" strike="noStrike">
+                <a:solidFill>
+                  <a:srgbClr val="007a8a"/>
                 </a:solidFill>
                 <a:latin typeface="Calibri"/>
                 <a:ea typeface="Calibri"/>
               </a:rPr>
-              <a:t>Introduction</a:t>
-            </a:r>
-            <a:endParaRPr b="0" lang="fr-FR" sz="3800" spc="-1" strike="noStrike">
+              <a:t>OpenSearch – Requêtes DSL</a:t>
+            </a:r>
+            <a:endParaRPr b="0" lang="fr-FR" sz="2000" spc="-1" strike="noStrike">
               <a:solidFill>
                 <a:srgbClr val="ffffff"/>
               </a:solidFill>
@@ -2419,14 +2461,14 @@
       </p:sp>
       <p:sp>
         <p:nvSpPr>
-          <p:cNvPr id="26" name="Text 2"/>
-          <p:cNvSpPr/>
-          <p:nvPr/>
-        </p:nvSpPr>
-        <p:spPr>
-          <a:xfrm>
-            <a:off x="411480" y="2697480"/>
-            <a:ext cx="8319960" cy="639000"/>
+          <p:cNvPr id="26" name="Text 9"/>
+          <p:cNvSpPr/>
+          <p:nvPr/>
+        </p:nvSpPr>
+        <p:spPr>
+          <a:xfrm>
+            <a:off x="457200" y="1325880"/>
+            <a:ext cx="7314480" cy="1005120"/>
           </a:xfrm>
           <a:prstGeom prst="rect">
             <a:avLst/>
@@ -2443,7 +2485,7 @@
           <a:fontRef idx="minor"/>
         </p:style>
         <p:txBody>
-          <a:bodyPr lIns="0" rIns="0" tIns="0" bIns="0" anchor="t">
+          <a:bodyPr lIns="90000" rIns="90000" tIns="45000" bIns="45000" anchor="ctr">
             <a:noAutofit/>
           </a:bodyPr>
           <a:p>
@@ -2456,16 +2498,193 @@
               </a:tabLst>
             </a:pPr>
             <a:r>
-              <a:rPr b="0" lang="en-US" sz="1800" spc="-1" strike="noStrike">
-                <a:solidFill>
-                  <a:srgbClr val="a8d4dc"/>
+              <a:rPr b="1" lang="en-US" sz="4400" spc="-1" strike="noStrike">
+                <a:solidFill>
+                  <a:srgbClr val="ffffff"/>
                 </a:solidFill>
                 <a:latin typeface="Calibri"/>
                 <a:ea typeface="Calibri"/>
               </a:rPr>
-              <a:t>Historique · Comparaison · Composants · Architecture</a:t>
+              <a:t>Principaux opérateurs</a:t>
+            </a:r>
+            <a:endParaRPr b="0" lang="fr-FR" sz="4400" spc="-1" strike="noStrike">
+              <a:solidFill>
+                <a:srgbClr val="ffffff"/>
+              </a:solidFill>
+              <a:latin typeface="Arial"/>
+            </a:endParaRPr>
+          </a:p>
+        </p:txBody>
+      </p:sp>
+      <p:sp>
+        <p:nvSpPr>
+          <p:cNvPr id="27" name="Text 11"/>
+          <p:cNvSpPr/>
+          <p:nvPr/>
+        </p:nvSpPr>
+        <p:spPr>
+          <a:xfrm>
+            <a:off x="457200" y="2331720"/>
+            <a:ext cx="7314480" cy="502200"/>
+          </a:xfrm>
+          <a:prstGeom prst="rect">
+            <a:avLst/>
+          </a:prstGeom>
+          <a:noFill/>
+          <a:ln w="0">
+            <a:noFill/>
+          </a:ln>
+        </p:spPr>
+        <p:style>
+          <a:lnRef idx="0"/>
+          <a:fillRef idx="0"/>
+          <a:effectRef idx="0"/>
+          <a:fontRef idx="minor"/>
+        </p:style>
+        <p:txBody>
+          <a:bodyPr lIns="90000" rIns="90000" tIns="45000" bIns="45000" anchor="ctr">
+            <a:noAutofit/>
+          </a:bodyPr>
+          <a:p>
+            <a:pPr defTabSz="914400">
+              <a:lnSpc>
+                <a:spcPct val="100000"/>
+              </a:lnSpc>
+              <a:tabLst>
+                <a:tab algn="l" pos="0"/>
+              </a:tabLst>
+            </a:pPr>
+            <a:r>
+              <a:rPr b="0" i="1" lang="en-US" sz="1800" spc="-1" strike="noStrike">
+                <a:solidFill>
+                  <a:srgbClr val="4a7480"/>
+                </a:solidFill>
+                <a:latin typeface="Calibri"/>
+                <a:ea typeface="Calibri"/>
+              </a:rPr>
+              <a:t>Query Domain Specific Language</a:t>
             </a:r>
             <a:endParaRPr b="0" lang="fr-FR" sz="1800" spc="-1" strike="noStrike">
+              <a:solidFill>
+                <a:srgbClr val="ffffff"/>
+              </a:solidFill>
+              <a:latin typeface="Arial"/>
+            </a:endParaRPr>
+          </a:p>
+        </p:txBody>
+      </p:sp>
+      <p:sp>
+        <p:nvSpPr>
+          <p:cNvPr id="28" name="Shape 2"/>
+          <p:cNvSpPr/>
+          <p:nvPr/>
+        </p:nvSpPr>
+        <p:spPr>
+          <a:xfrm>
+            <a:off x="164520" y="4297680"/>
+            <a:ext cx="8978760" cy="840600"/>
+          </a:xfrm>
+          <a:prstGeom prst="rect">
+            <a:avLst/>
+          </a:prstGeom>
+          <a:solidFill>
+            <a:srgbClr val="00404f"/>
+          </a:solidFill>
+          <a:ln w="0">
+            <a:noFill/>
+          </a:ln>
+        </p:spPr>
+        <p:style>
+          <a:lnRef idx="0"/>
+          <a:fillRef idx="0"/>
+          <a:effectRef idx="0"/>
+          <a:fontRef idx="minor"/>
+        </p:style>
+        <p:txBody>
+          <a:bodyPr lIns="90000" rIns="90000" tIns="45000" bIns="45000" anchor="t">
+            <a:noAutofit/>
+          </a:bodyPr>
+          <a:p>
+            <a:pPr>
+              <a:lnSpc>
+                <a:spcPct val="100000"/>
+              </a:lnSpc>
+            </a:pPr>
+            <a:endParaRPr b="0" lang="fr-FR" sz="1800" spc="-1" strike="noStrike">
+              <a:solidFill>
+                <a:srgbClr val="ffffff"/>
+              </a:solidFill>
+              <a:latin typeface="Arial"/>
+            </a:endParaRPr>
+          </a:p>
+        </p:txBody>
+      </p:sp>
+      <p:sp>
+        <p:nvSpPr>
+          <p:cNvPr id="29" name="Text 13"/>
+          <p:cNvSpPr/>
+          <p:nvPr/>
+        </p:nvSpPr>
+        <p:spPr>
+          <a:xfrm>
+            <a:off x="365760" y="4370760"/>
+            <a:ext cx="8686080" cy="694080"/>
+          </a:xfrm>
+          <a:prstGeom prst="rect">
+            <a:avLst/>
+          </a:prstGeom>
+          <a:noFill/>
+          <a:ln w="0">
+            <a:noFill/>
+          </a:ln>
+        </p:spPr>
+        <p:style>
+          <a:lnRef idx="0"/>
+          <a:fillRef idx="0"/>
+          <a:effectRef idx="0"/>
+          <a:fontRef idx="minor"/>
+        </p:style>
+        <p:txBody>
+          <a:bodyPr lIns="0" rIns="0" tIns="0" bIns="0" anchor="ctr">
+            <a:noAutofit/>
+          </a:bodyPr>
+          <a:p>
+            <a:pPr defTabSz="914400">
+              <a:lnSpc>
+                <a:spcPct val="100000"/>
+              </a:lnSpc>
+              <a:tabLst>
+                <a:tab algn="l" pos="0"/>
+              </a:tabLst>
+            </a:pPr>
+            <a:r>
+              <a:rPr b="0" lang="en-US" sz="1300" spc="-1" strike="noStrike">
+                <a:solidFill>
+                  <a:srgbClr val="4a7480"/>
+                </a:solidFill>
+                <a:latin typeface="Calibri"/>
+              </a:rPr>
+              <a:t>Syntaxe DSL  •  </a:t>
+            </a:r>
+            <a:r>
+              <a:rPr b="1" lang="en-US" sz="1300" spc="-1" strike="noStrike">
+                <a:solidFill>
+                  <a:srgbClr val="e8834a"/>
+                </a:solidFill>
+                <a:latin typeface="Calibri"/>
+              </a:rPr>
+              <a:t>Principaux opérateurs  •  </a:t>
+            </a:r>
+            <a:r>
+              <a:rPr b="0" lang="en-US" sz="1300" spc="-1" strike="noStrike">
+                <a:solidFill>
+                  <a:srgbClr val="4a7480"/>
+                </a:solidFill>
+                <a:latin typeface="Calibri"/>
+              </a:rPr>
+              <a:t>Agrégations</a:t>
+            </a:r>
+            <a:endParaRPr b="0" lang="fr-FR" sz="1300" spc="-1" strike="noStrike">
               <a:solidFill>
                 <a:srgbClr val="ffffff"/>
               </a:solidFill>
@@ -2513,14 +2732,14 @@
       </p:grpSpPr>
       <p:sp>
         <p:nvSpPr>
-          <p:cNvPr id="27" name="Shape 42"/>
+          <p:cNvPr id="30" name="Shape 42"/>
           <p:cNvSpPr/>
           <p:nvPr/>
         </p:nvSpPr>
         <p:spPr>
           <a:xfrm>
             <a:off x="0" y="0"/>
-            <a:ext cx="9142920" cy="657360"/>
+            <a:ext cx="9142200" cy="656640"/>
           </a:xfrm>
           <a:prstGeom prst="rect">
             <a:avLst/>
@@ -2559,14 +2778,14 @@
       </p:sp>
       <p:sp>
         <p:nvSpPr>
-          <p:cNvPr id="28" name="Shape 45"/>
+          <p:cNvPr id="31" name="Shape 45"/>
           <p:cNvSpPr/>
           <p:nvPr/>
         </p:nvSpPr>
         <p:spPr>
           <a:xfrm>
             <a:off x="0" y="0"/>
-            <a:ext cx="163440" cy="657360"/>
+            <a:ext cx="162720" cy="656640"/>
           </a:xfrm>
           <a:prstGeom prst="rect">
             <a:avLst/>
@@ -2605,14 +2824,14 @@
       </p:sp>
       <p:sp>
         <p:nvSpPr>
-          <p:cNvPr id="29" name="Text 41"/>
+          <p:cNvPr id="32" name="Text 41"/>
           <p:cNvSpPr/>
           <p:nvPr/>
         </p:nvSpPr>
         <p:spPr>
           <a:xfrm>
             <a:off x="347400" y="54720"/>
-            <a:ext cx="8411400" cy="547560"/>
+            <a:ext cx="8410680" cy="546840"/>
           </a:xfrm>
           <a:prstGeom prst="rect">
             <a:avLst/>
@@ -2662,14 +2881,14 @@
       </p:sp>
       <p:sp>
         <p:nvSpPr>
-          <p:cNvPr id="30" name="Shape 46"/>
+          <p:cNvPr id="33" name="Shape 46"/>
           <p:cNvSpPr/>
           <p:nvPr/>
         </p:nvSpPr>
         <p:spPr>
           <a:xfrm>
             <a:off x="1371600" y="914400"/>
-            <a:ext cx="63000" cy="3839400"/>
+            <a:ext cx="62280" cy="3838680"/>
           </a:xfrm>
           <a:prstGeom prst="rect">
             <a:avLst/>
@@ -2708,14 +2927,14 @@
       </p:sp>
       <p:sp>
         <p:nvSpPr>
-          <p:cNvPr id="31" name="Shape 47"/>
+          <p:cNvPr id="34" name="Shape 47"/>
           <p:cNvSpPr/>
           <p:nvPr/>
         </p:nvSpPr>
         <p:spPr>
           <a:xfrm>
             <a:off x="1143000" y="932760"/>
-            <a:ext cx="254880" cy="254880"/>
+            <a:ext cx="254160" cy="254160"/>
           </a:xfrm>
           <a:prstGeom prst="ellipse">
             <a:avLst/>
@@ -2754,14 +2973,14 @@
       </p:sp>
       <p:sp>
         <p:nvSpPr>
-          <p:cNvPr id="32" name="Text 43"/>
+          <p:cNvPr id="35" name="Text 43"/>
           <p:cNvSpPr/>
           <p:nvPr/>
         </p:nvSpPr>
         <p:spPr>
           <a:xfrm>
             <a:off x="91440" y="868680"/>
-            <a:ext cx="1004760" cy="383040"/>
+            <a:ext cx="1004040" cy="382320"/>
           </a:xfrm>
           <a:prstGeom prst="rect">
             <a:avLst/>
@@ -2811,14 +3030,14 @@
       </p:sp>
       <p:sp>
         <p:nvSpPr>
-          <p:cNvPr id="33" name="Shape 48"/>
+          <p:cNvPr id="36" name="Shape 48"/>
           <p:cNvSpPr/>
           <p:nvPr/>
         </p:nvSpPr>
         <p:spPr>
           <a:xfrm>
             <a:off x="1554480" y="868680"/>
-            <a:ext cx="7222680" cy="383040"/>
+            <a:ext cx="7221960" cy="382320"/>
           </a:xfrm>
           <a:prstGeom prst="rect">
             <a:avLst/>
@@ -2857,14 +3076,14 @@
       </p:sp>
       <p:sp>
         <p:nvSpPr>
-          <p:cNvPr id="34" name="Text 44"/>
+          <p:cNvPr id="37" name="Text 44"/>
           <p:cNvSpPr/>
           <p:nvPr/>
         </p:nvSpPr>
         <p:spPr>
           <a:xfrm>
             <a:off x="1645920" y="868680"/>
-            <a:ext cx="7039800" cy="383040"/>
+            <a:ext cx="7039080" cy="382320"/>
           </a:xfrm>
           <a:prstGeom prst="rect">
             <a:avLst/>
@@ -2914,14 +3133,14 @@
       </p:sp>
       <p:sp>
         <p:nvSpPr>
-          <p:cNvPr id="35" name="Shape 49"/>
+          <p:cNvPr id="38" name="Shape 49"/>
           <p:cNvSpPr/>
           <p:nvPr/>
         </p:nvSpPr>
         <p:spPr>
           <a:xfrm>
             <a:off x="1143000" y="1472040"/>
-            <a:ext cx="254880" cy="254880"/>
+            <a:ext cx="254160" cy="254160"/>
           </a:xfrm>
           <a:prstGeom prst="ellipse">
             <a:avLst/>
@@ -2960,14 +3179,14 @@
       </p:sp>
       <p:sp>
         <p:nvSpPr>
-          <p:cNvPr id="36" name="Text 46"/>
+          <p:cNvPr id="39" name="Text 46"/>
           <p:cNvSpPr/>
           <p:nvPr/>
         </p:nvSpPr>
         <p:spPr>
           <a:xfrm>
             <a:off x="91440" y="1408320"/>
-            <a:ext cx="1004760" cy="383040"/>
+            <a:ext cx="1004040" cy="382320"/>
           </a:xfrm>
           <a:prstGeom prst="rect">
             <a:avLst/>
@@ -3017,14 +3236,14 @@
       </p:sp>
       <p:sp>
         <p:nvSpPr>
-          <p:cNvPr id="37" name="Shape 50"/>
+          <p:cNvPr id="40" name="Shape 50"/>
           <p:cNvSpPr/>
           <p:nvPr/>
         </p:nvSpPr>
         <p:spPr>
           <a:xfrm>
             <a:off x="1554480" y="1408320"/>
-            <a:ext cx="7222680" cy="383040"/>
+            <a:ext cx="7221960" cy="382320"/>
           </a:xfrm>
           <a:prstGeom prst="rect">
             <a:avLst/>
@@ -3063,14 +3282,14 @@
       </p:sp>
       <p:sp>
         <p:nvSpPr>
-          <p:cNvPr id="38" name="Text 47"/>
+          <p:cNvPr id="41" name="Text 47"/>
           <p:cNvSpPr/>
           <p:nvPr/>
         </p:nvSpPr>
         <p:spPr>
           <a:xfrm>
             <a:off x="1645920" y="1408320"/>
-            <a:ext cx="7039800" cy="383040"/>
+            <a:ext cx="7039080" cy="382320"/>
           </a:xfrm>
           <a:prstGeom prst="rect">
             <a:avLst/>
@@ -3120,14 +3339,14 @@
       </p:sp>
       <p:sp>
         <p:nvSpPr>
-          <p:cNvPr id="39" name="Shape 51"/>
+          <p:cNvPr id="42" name="Shape 51"/>
           <p:cNvSpPr/>
           <p:nvPr/>
         </p:nvSpPr>
         <p:spPr>
           <a:xfrm>
             <a:off x="1143000" y="2011680"/>
-            <a:ext cx="254880" cy="254880"/>
+            <a:ext cx="254160" cy="254160"/>
           </a:xfrm>
           <a:prstGeom prst="ellipse">
             <a:avLst/>
@@ -3166,14 +3385,14 @@
       </p:sp>
       <p:sp>
         <p:nvSpPr>
-          <p:cNvPr id="40" name="Text 48"/>
+          <p:cNvPr id="43" name="Text 48"/>
           <p:cNvSpPr/>
           <p:nvPr/>
         </p:nvSpPr>
         <p:spPr>
           <a:xfrm>
             <a:off x="91440" y="1947600"/>
-            <a:ext cx="1004760" cy="383040"/>
+            <a:ext cx="1004040" cy="382320"/>
           </a:xfrm>
           <a:prstGeom prst="rect">
             <a:avLst/>
@@ -3223,14 +3442,14 @@
       </p:sp>
       <p:sp>
         <p:nvSpPr>
-          <p:cNvPr id="41" name="Shape 52"/>
+          <p:cNvPr id="44" name="Shape 52"/>
           <p:cNvSpPr/>
           <p:nvPr/>
         </p:nvSpPr>
         <p:spPr>
           <a:xfrm>
             <a:off x="1554480" y="1947600"/>
-            <a:ext cx="7222680" cy="383040"/>
+            <a:ext cx="7221960" cy="382320"/>
           </a:xfrm>
           <a:prstGeom prst="rect">
             <a:avLst/>
@@ -3269,14 +3488,14 @@
       </p:sp>
       <p:sp>
         <p:nvSpPr>
-          <p:cNvPr id="42" name="Text 49"/>
+          <p:cNvPr id="45" name="Text 49"/>
           <p:cNvSpPr/>
           <p:nvPr/>
         </p:nvSpPr>
         <p:spPr>
           <a:xfrm>
             <a:off x="1645920" y="1947600"/>
-            <a:ext cx="7039800" cy="383040"/>
+            <a:ext cx="7039080" cy="382320"/>
           </a:xfrm>
           <a:prstGeom prst="rect">
             <a:avLst/>
@@ -3326,14 +3545,14 @@
       </p:sp>
       <p:sp>
         <p:nvSpPr>
-          <p:cNvPr id="43" name="Shape 53"/>
+          <p:cNvPr id="46" name="Shape 53"/>
           <p:cNvSpPr/>
           <p:nvPr/>
         </p:nvSpPr>
         <p:spPr>
           <a:xfrm>
             <a:off x="1143000" y="2551320"/>
-            <a:ext cx="254880" cy="254880"/>
+            <a:ext cx="254160" cy="254160"/>
           </a:xfrm>
           <a:prstGeom prst="ellipse">
             <a:avLst/>
@@ -3372,14 +3591,14 @@
       </p:sp>
       <p:sp>
         <p:nvSpPr>
-          <p:cNvPr id="44" name="Text 50"/>
+          <p:cNvPr id="47" name="Text 50"/>
           <p:cNvSpPr/>
           <p:nvPr/>
         </p:nvSpPr>
         <p:spPr>
           <a:xfrm>
             <a:off x="91440" y="2487240"/>
-            <a:ext cx="1004760" cy="383040"/>
+            <a:ext cx="1004040" cy="382320"/>
           </a:xfrm>
           <a:prstGeom prst="rect">
             <a:avLst/>
@@ -3429,14 +3648,14 @@
       </p:sp>
       <p:sp>
         <p:nvSpPr>
-          <p:cNvPr id="45" name="Shape 54"/>
+          <p:cNvPr id="48" name="Shape 54"/>
           <p:cNvSpPr/>
           <p:nvPr/>
         </p:nvSpPr>
         <p:spPr>
           <a:xfrm>
             <a:off x="1554480" y="2487240"/>
-            <a:ext cx="7222680" cy="383040"/>
+            <a:ext cx="7221960" cy="382320"/>
           </a:xfrm>
           <a:prstGeom prst="rect">
             <a:avLst/>
@@ -3475,14 +3694,14 @@
       </p:sp>
       <p:sp>
         <p:nvSpPr>
-          <p:cNvPr id="46" name="Text 51"/>
+          <p:cNvPr id="49" name="Text 51"/>
           <p:cNvSpPr/>
           <p:nvPr/>
         </p:nvSpPr>
         <p:spPr>
           <a:xfrm>
             <a:off x="1645920" y="2487240"/>
-            <a:ext cx="7039800" cy="383040"/>
+            <a:ext cx="7039080" cy="382320"/>
           </a:xfrm>
           <a:prstGeom prst="rect">
             <a:avLst/>
@@ -3532,14 +3751,14 @@
       </p:sp>
       <p:sp>
         <p:nvSpPr>
-          <p:cNvPr id="47" name="Shape 55"/>
+          <p:cNvPr id="50" name="Shape 55"/>
           <p:cNvSpPr/>
           <p:nvPr/>
         </p:nvSpPr>
         <p:spPr>
           <a:xfrm>
             <a:off x="1143000" y="3090600"/>
-            <a:ext cx="254880" cy="254880"/>
+            <a:ext cx="254160" cy="254160"/>
           </a:xfrm>
           <a:prstGeom prst="ellipse">
             <a:avLst/>
@@ -3578,14 +3797,14 @@
       </p:sp>
       <p:sp>
         <p:nvSpPr>
-          <p:cNvPr id="48" name="Text 52"/>
+          <p:cNvPr id="51" name="Text 52"/>
           <p:cNvSpPr/>
           <p:nvPr/>
         </p:nvSpPr>
         <p:spPr>
           <a:xfrm>
             <a:off x="91440" y="3026520"/>
-            <a:ext cx="1004760" cy="383040"/>
+            <a:ext cx="1004040" cy="382320"/>
           </a:xfrm>
           <a:prstGeom prst="rect">
             <a:avLst/>
@@ -3635,14 +3854,14 @@
       </p:sp>
       <p:sp>
         <p:nvSpPr>
-          <p:cNvPr id="49" name="Shape 56"/>
+          <p:cNvPr id="52" name="Shape 56"/>
           <p:cNvSpPr/>
           <p:nvPr/>
         </p:nvSpPr>
         <p:spPr>
           <a:xfrm>
             <a:off x="1554480" y="3026520"/>
-            <a:ext cx="7222680" cy="383040"/>
+            <a:ext cx="7221960" cy="382320"/>
           </a:xfrm>
           <a:prstGeom prst="rect">
             <a:avLst/>
@@ -3681,14 +3900,14 @@
       </p:sp>
       <p:sp>
         <p:nvSpPr>
-          <p:cNvPr id="50" name="Text 53"/>
+          <p:cNvPr id="53" name="Text 53"/>
           <p:cNvSpPr/>
           <p:nvPr/>
         </p:nvSpPr>
         <p:spPr>
           <a:xfrm>
             <a:off x="1645920" y="3026520"/>
-            <a:ext cx="7039800" cy="383040"/>
+            <a:ext cx="7039080" cy="382320"/>
           </a:xfrm>
           <a:prstGeom prst="rect">
             <a:avLst/>
@@ -3738,14 +3957,14 @@
       </p:sp>
       <p:sp>
         <p:nvSpPr>
-          <p:cNvPr id="51" name="Shape 57"/>
+          <p:cNvPr id="54" name="Shape 57"/>
           <p:cNvSpPr/>
           <p:nvPr/>
         </p:nvSpPr>
         <p:spPr>
           <a:xfrm>
             <a:off x="1143000" y="3630240"/>
-            <a:ext cx="254880" cy="254880"/>
+            <a:ext cx="254160" cy="254160"/>
           </a:xfrm>
           <a:prstGeom prst="ellipse">
             <a:avLst/>
@@ -3784,14 +4003,14 @@
       </p:sp>
       <p:sp>
         <p:nvSpPr>
-          <p:cNvPr id="52" name="Text 54"/>
+          <p:cNvPr id="55" name="Text 54"/>
           <p:cNvSpPr/>
           <p:nvPr/>
         </p:nvSpPr>
         <p:spPr>
           <a:xfrm>
             <a:off x="91440" y="3566160"/>
-            <a:ext cx="1004760" cy="383040"/>
+            <a:ext cx="1004040" cy="382320"/>
           </a:xfrm>
           <a:prstGeom prst="rect">
             <a:avLst/>
@@ -3841,14 +4060,14 @@
       </p:sp>
       <p:sp>
         <p:nvSpPr>
-          <p:cNvPr id="53" name="Shape 58"/>
+          <p:cNvPr id="56" name="Shape 58"/>
           <p:cNvSpPr/>
           <p:nvPr/>
         </p:nvSpPr>
         <p:spPr>
           <a:xfrm>
             <a:off x="1554480" y="3566160"/>
-            <a:ext cx="7222680" cy="383040"/>
+            <a:ext cx="7221960" cy="382320"/>
           </a:xfrm>
           <a:prstGeom prst="rect">
             <a:avLst/>
@@ -3887,14 +4106,14 @@
       </p:sp>
       <p:sp>
         <p:nvSpPr>
-          <p:cNvPr id="54" name="Text 55"/>
+          <p:cNvPr id="57" name="Text 55"/>
           <p:cNvSpPr/>
           <p:nvPr/>
         </p:nvSpPr>
         <p:spPr>
           <a:xfrm>
             <a:off x="1645920" y="3566160"/>
-            <a:ext cx="7039800" cy="383040"/>
+            <a:ext cx="7039080" cy="382320"/>
           </a:xfrm>
           <a:prstGeom prst="rect">
             <a:avLst/>
@@ -3944,14 +4163,14 @@
       </p:sp>
       <p:sp>
         <p:nvSpPr>
-          <p:cNvPr id="55" name="Shape 59"/>
+          <p:cNvPr id="58" name="Shape 59"/>
           <p:cNvSpPr/>
           <p:nvPr/>
         </p:nvSpPr>
         <p:spPr>
           <a:xfrm>
             <a:off x="1143000" y="4169520"/>
-            <a:ext cx="254880" cy="254880"/>
+            <a:ext cx="254160" cy="254160"/>
           </a:xfrm>
           <a:prstGeom prst="ellipse">
             <a:avLst/>
@@ -3990,14 +4209,14 @@
       </p:sp>
       <p:sp>
         <p:nvSpPr>
-          <p:cNvPr id="56" name="Text 56"/>
+          <p:cNvPr id="59" name="Text 56"/>
           <p:cNvSpPr/>
           <p:nvPr/>
         </p:nvSpPr>
         <p:spPr>
           <a:xfrm>
             <a:off x="91440" y="4105800"/>
-            <a:ext cx="1004760" cy="383040"/>
+            <a:ext cx="1004040" cy="382320"/>
           </a:xfrm>
           <a:prstGeom prst="rect">
             <a:avLst/>
@@ -4047,14 +4266,14 @@
       </p:sp>
       <p:sp>
         <p:nvSpPr>
-          <p:cNvPr id="57" name="Shape 60"/>
+          <p:cNvPr id="60" name="Shape 60"/>
           <p:cNvSpPr/>
           <p:nvPr/>
         </p:nvSpPr>
         <p:spPr>
           <a:xfrm>
             <a:off x="1554480" y="4105800"/>
-            <a:ext cx="7222680" cy="383040"/>
+            <a:ext cx="7221960" cy="382320"/>
           </a:xfrm>
           <a:prstGeom prst="rect">
             <a:avLst/>
@@ -4093,14 +4312,14 @@
       </p:sp>
       <p:sp>
         <p:nvSpPr>
-          <p:cNvPr id="58" name="Text 57"/>
+          <p:cNvPr id="61" name="Text 57"/>
           <p:cNvSpPr/>
           <p:nvPr/>
         </p:nvSpPr>
         <p:spPr>
           <a:xfrm>
             <a:off x="1645920" y="4105800"/>
-            <a:ext cx="7039800" cy="383040"/>
+            <a:ext cx="7039080" cy="382320"/>
           </a:xfrm>
           <a:prstGeom prst="rect">
             <a:avLst/>
@@ -4187,14 +4406,14 @@
       </p:grpSpPr>
       <p:sp>
         <p:nvSpPr>
-          <p:cNvPr id="59" name="Shape 510"/>
+          <p:cNvPr id="62" name="Shape 510"/>
           <p:cNvSpPr/>
           <p:nvPr/>
         </p:nvSpPr>
         <p:spPr>
           <a:xfrm>
             <a:off x="0" y="0"/>
-            <a:ext cx="9142920" cy="821880"/>
+            <a:ext cx="9142200" cy="821160"/>
           </a:xfrm>
           <a:prstGeom prst="rect">
             <a:avLst/>
@@ -4236,14 +4455,14 @@
       </p:sp>
       <p:sp>
         <p:nvSpPr>
-          <p:cNvPr id="60" name="Shape 511"/>
+          <p:cNvPr id="63" name="Shape 511"/>
           <p:cNvSpPr/>
           <p:nvPr/>
         </p:nvSpPr>
         <p:spPr>
           <a:xfrm>
             <a:off x="0" y="0"/>
-            <a:ext cx="501840" cy="821880"/>
+            <a:ext cx="501120" cy="821160"/>
           </a:xfrm>
           <a:prstGeom prst="rect">
             <a:avLst/>
@@ -4285,14 +4504,14 @@
       </p:sp>
       <p:sp>
         <p:nvSpPr>
-          <p:cNvPr id="61" name="Text 477"/>
+          <p:cNvPr id="64" name="Text 477"/>
           <p:cNvSpPr/>
           <p:nvPr/>
         </p:nvSpPr>
         <p:spPr>
           <a:xfrm>
             <a:off x="640080" y="0"/>
-            <a:ext cx="7954200" cy="821880"/>
+            <a:ext cx="7953480" cy="821160"/>
           </a:xfrm>
           <a:prstGeom prst="rect">
             <a:avLst/>
@@ -4342,14 +4561,386 @@
       </p:sp>
       <p:sp>
         <p:nvSpPr>
-          <p:cNvPr id="62" name="Shape 512"/>
-          <p:cNvSpPr/>
-          <p:nvPr/>
-        </p:nvSpPr>
-        <p:spPr>
-          <a:xfrm>
-            <a:off x="7955280" y="155520"/>
-            <a:ext cx="1004760" cy="456120"/>
+          <p:cNvPr id="65" name="Shape 513"/>
+          <p:cNvSpPr/>
+          <p:nvPr/>
+        </p:nvSpPr>
+        <p:spPr>
+          <a:xfrm>
+            <a:off x="274320" y="987480"/>
+            <a:ext cx="1004040" cy="528480"/>
+          </a:xfrm>
+          <a:prstGeom prst="rect">
+            <a:avLst/>
+          </a:prstGeom>
+          <a:solidFill>
+            <a:srgbClr val="2e7d32"/>
+          </a:solidFill>
+          <a:ln w="12700">
+            <a:solidFill>
+              <a:srgbClr val="2e7d32"/>
+            </a:solidFill>
+            <a:round/>
+          </a:ln>
+        </p:spPr>
+        <p:style>
+          <a:lnRef idx="0"/>
+          <a:fillRef idx="0"/>
+          <a:effectRef idx="0"/>
+          <a:fontRef idx="minor"/>
+        </p:style>
+        <p:txBody>
+          <a:bodyPr lIns="90000" rIns="90000" tIns="45000" bIns="45000" anchor="t">
+            <a:noAutofit/>
+          </a:bodyPr>
+          <a:p>
+            <a:pPr>
+              <a:lnSpc>
+                <a:spcPct val="100000"/>
+              </a:lnSpc>
+            </a:pPr>
+            <a:endParaRPr b="0" lang="fr-FR" sz="1800" spc="-1" strike="noStrike">
+              <a:solidFill>
+                <a:srgbClr val="ffffff"/>
+              </a:solidFill>
+              <a:latin typeface="Arial"/>
+            </a:endParaRPr>
+          </a:p>
+        </p:txBody>
+      </p:sp>
+      <p:sp>
+        <p:nvSpPr>
+          <p:cNvPr id="66" name="Text 479"/>
+          <p:cNvSpPr/>
+          <p:nvPr/>
+        </p:nvSpPr>
+        <p:spPr>
+          <a:xfrm>
+            <a:off x="274320" y="987480"/>
+            <a:ext cx="1004040" cy="528480"/>
+          </a:xfrm>
+          <a:prstGeom prst="rect">
+            <a:avLst/>
+          </a:prstGeom>
+          <a:noFill/>
+          <a:ln w="0">
+            <a:noFill/>
+          </a:ln>
+        </p:spPr>
+        <p:style>
+          <a:lnRef idx="0"/>
+          <a:fillRef idx="0"/>
+          <a:effectRef idx="0"/>
+          <a:fontRef idx="minor"/>
+        </p:style>
+        <p:txBody>
+          <a:bodyPr lIns="0" rIns="0" tIns="0" bIns="0" anchor="ctr">
+            <a:noAutofit/>
+          </a:bodyPr>
+          <a:p>
+            <a:pPr algn="ctr" defTabSz="914400">
+              <a:lnSpc>
+                <a:spcPct val="100000"/>
+              </a:lnSpc>
+              <a:tabLst>
+                <a:tab algn="l" pos="0"/>
+              </a:tabLst>
+            </a:pPr>
+            <a:r>
+              <a:rPr b="1" lang="en-US" sz="1000" spc="-1" strike="noStrike">
+                <a:solidFill>
+                  <a:srgbClr val="ffffff"/>
+                </a:solidFill>
+                <a:latin typeface="Calibri"/>
+              </a:rPr>
+              <a:t>POST</a:t>
+            </a:r>
+            <a:endParaRPr b="0" lang="fr-FR" sz="1000" spc="-1" strike="noStrike">
+              <a:solidFill>
+                <a:srgbClr val="000000"/>
+              </a:solidFill>
+              <a:latin typeface="Arial"/>
+            </a:endParaRPr>
+          </a:p>
+        </p:txBody>
+      </p:sp>
+      <p:sp>
+        <p:nvSpPr>
+          <p:cNvPr id="67" name="Shape 514"/>
+          <p:cNvSpPr/>
+          <p:nvPr/>
+        </p:nvSpPr>
+        <p:spPr>
+          <a:xfrm>
+            <a:off x="1325880" y="987480"/>
+            <a:ext cx="2009880" cy="528480"/>
+          </a:xfrm>
+          <a:prstGeom prst="rect">
+            <a:avLst/>
+          </a:prstGeom>
+          <a:solidFill>
+            <a:srgbClr val="f5f9fa"/>
+          </a:solidFill>
+          <a:ln w="12700">
+            <a:solidFill>
+              <a:srgbClr val="eaf4f6"/>
+            </a:solidFill>
+            <a:round/>
+          </a:ln>
+        </p:spPr>
+        <p:style>
+          <a:lnRef idx="0"/>
+          <a:fillRef idx="0"/>
+          <a:effectRef idx="0"/>
+          <a:fontRef idx="minor"/>
+        </p:style>
+        <p:txBody>
+          <a:bodyPr lIns="90000" rIns="90000" tIns="45000" bIns="45000" anchor="t">
+            <a:noAutofit/>
+          </a:bodyPr>
+          <a:p>
+            <a:pPr>
+              <a:lnSpc>
+                <a:spcPct val="100000"/>
+              </a:lnSpc>
+            </a:pPr>
+            <a:endParaRPr b="0" lang="fr-FR" sz="1800" spc="-1" strike="noStrike">
+              <a:solidFill>
+                <a:srgbClr val="000000"/>
+              </a:solidFill>
+              <a:latin typeface="Arial"/>
+            </a:endParaRPr>
+          </a:p>
+        </p:txBody>
+      </p:sp>
+      <p:sp>
+        <p:nvSpPr>
+          <p:cNvPr id="68" name="Text 480"/>
+          <p:cNvSpPr/>
+          <p:nvPr/>
+        </p:nvSpPr>
+        <p:spPr>
+          <a:xfrm>
+            <a:off x="1371600" y="987480"/>
+            <a:ext cx="1918440" cy="528480"/>
+          </a:xfrm>
+          <a:prstGeom prst="rect">
+            <a:avLst/>
+          </a:prstGeom>
+          <a:noFill/>
+          <a:ln w="0">
+            <a:noFill/>
+          </a:ln>
+        </p:spPr>
+        <p:style>
+          <a:lnRef idx="0"/>
+          <a:fillRef idx="0"/>
+          <a:effectRef idx="0"/>
+          <a:fontRef idx="minor"/>
+        </p:style>
+        <p:txBody>
+          <a:bodyPr lIns="90000" rIns="90000" tIns="45000" bIns="45000" anchor="ctr">
+            <a:noAutofit/>
+          </a:bodyPr>
+          <a:p>
+            <a:pPr defTabSz="914400">
+              <a:lnSpc>
+                <a:spcPct val="100000"/>
+              </a:lnSpc>
+              <a:tabLst>
+                <a:tab algn="l" pos="0"/>
+              </a:tabLst>
+            </a:pPr>
+            <a:r>
+              <a:rPr b="1" lang="en-US" sz="1000" spc="-1" strike="noStrike">
+                <a:solidFill>
+                  <a:srgbClr val="2e7d32"/>
+                </a:solidFill>
+                <a:latin typeface="Calibri"/>
+              </a:rPr>
+              <a:t>Créer (ID auto)</a:t>
+            </a:r>
+            <a:endParaRPr b="0" lang="fr-FR" sz="1000" spc="-1" strike="noStrike">
+              <a:solidFill>
+                <a:srgbClr val="000000"/>
+              </a:solidFill>
+              <a:latin typeface="Arial"/>
+            </a:endParaRPr>
+          </a:p>
+        </p:txBody>
+      </p:sp>
+      <p:sp>
+        <p:nvSpPr>
+          <p:cNvPr id="69" name="Shape 515"/>
+          <p:cNvSpPr/>
+          <p:nvPr/>
+        </p:nvSpPr>
+        <p:spPr>
+          <a:xfrm>
+            <a:off x="3383280" y="987480"/>
+            <a:ext cx="2467080" cy="528480"/>
+          </a:xfrm>
+          <a:prstGeom prst="rect">
+            <a:avLst/>
+          </a:prstGeom>
+          <a:solidFill>
+            <a:srgbClr val="1a2b2f"/>
+          </a:solidFill>
+          <a:ln w="12700">
+            <a:solidFill>
+              <a:srgbClr val="1a2b2f"/>
+            </a:solidFill>
+            <a:round/>
+          </a:ln>
+        </p:spPr>
+        <p:style>
+          <a:lnRef idx="0"/>
+          <a:fillRef idx="0"/>
+          <a:effectRef idx="0"/>
+          <a:fontRef idx="minor"/>
+        </p:style>
+        <p:txBody>
+          <a:bodyPr lIns="90000" rIns="90000" tIns="45000" bIns="45000" anchor="t">
+            <a:noAutofit/>
+          </a:bodyPr>
+          <a:p>
+            <a:pPr>
+              <a:lnSpc>
+                <a:spcPct val="100000"/>
+              </a:lnSpc>
+            </a:pPr>
+            <a:endParaRPr b="0" lang="fr-FR" sz="1800" spc="-1" strike="noStrike">
+              <a:solidFill>
+                <a:srgbClr val="ffffff"/>
+              </a:solidFill>
+              <a:latin typeface="Arial"/>
+            </a:endParaRPr>
+          </a:p>
+        </p:txBody>
+      </p:sp>
+      <p:sp>
+        <p:nvSpPr>
+          <p:cNvPr id="70" name="Text 481"/>
+          <p:cNvSpPr/>
+          <p:nvPr/>
+        </p:nvSpPr>
+        <p:spPr>
+          <a:xfrm>
+            <a:off x="3429000" y="987480"/>
+            <a:ext cx="2375640" cy="528480"/>
+          </a:xfrm>
+          <a:prstGeom prst="rect">
+            <a:avLst/>
+          </a:prstGeom>
+          <a:noFill/>
+          <a:ln w="0">
+            <a:noFill/>
+          </a:ln>
+        </p:spPr>
+        <p:style>
+          <a:lnRef idx="0"/>
+          <a:fillRef idx="0"/>
+          <a:effectRef idx="0"/>
+          <a:fontRef idx="minor"/>
+        </p:style>
+        <p:txBody>
+          <a:bodyPr lIns="90000" rIns="90000" tIns="45000" bIns="45000" anchor="ctr">
+            <a:noAutofit/>
+          </a:bodyPr>
+          <a:p>
+            <a:pPr defTabSz="914400">
+              <a:lnSpc>
+                <a:spcPct val="100000"/>
+              </a:lnSpc>
+              <a:tabLst>
+                <a:tab algn="l" pos="0"/>
+              </a:tabLst>
+            </a:pPr>
+            <a:r>
+              <a:rPr b="0" lang="en-US" sz="850" spc="-1" strike="noStrike">
+                <a:solidFill>
+                  <a:srgbClr val="a8d4dc"/>
+                </a:solidFill>
+                <a:latin typeface="Consolas"/>
+                <a:ea typeface="Consolas"/>
+              </a:rPr>
+              <a:t>POST /mon-index/_doc</a:t>
+            </a:r>
+            <a:endParaRPr b="0" lang="fr-FR" sz="850" spc="-1" strike="noStrike">
+              <a:solidFill>
+                <a:srgbClr val="000000"/>
+              </a:solidFill>
+              <a:latin typeface="Arial"/>
+            </a:endParaRPr>
+          </a:p>
+        </p:txBody>
+      </p:sp>
+      <p:sp>
+        <p:nvSpPr>
+          <p:cNvPr id="71" name="Text 482"/>
+          <p:cNvSpPr/>
+          <p:nvPr/>
+        </p:nvSpPr>
+        <p:spPr>
+          <a:xfrm>
+            <a:off x="5943600" y="987480"/>
+            <a:ext cx="2924280" cy="528480"/>
+          </a:xfrm>
+          <a:prstGeom prst="rect">
+            <a:avLst/>
+          </a:prstGeom>
+          <a:noFill/>
+          <a:ln w="0">
+            <a:noFill/>
+          </a:ln>
+        </p:spPr>
+        <p:style>
+          <a:lnRef idx="0"/>
+          <a:fillRef idx="0"/>
+          <a:effectRef idx="0"/>
+          <a:fontRef idx="minor"/>
+        </p:style>
+        <p:txBody>
+          <a:bodyPr lIns="90000" rIns="90000" tIns="45000" bIns="45000" anchor="ctr">
+            <a:noAutofit/>
+          </a:bodyPr>
+          <a:p>
+            <a:pPr defTabSz="914400">
+              <a:lnSpc>
+                <a:spcPct val="100000"/>
+              </a:lnSpc>
+              <a:tabLst>
+                <a:tab algn="l" pos="0"/>
+              </a:tabLst>
+            </a:pPr>
+            <a:r>
+              <a:rPr b="0" i="1" lang="en-US" sz="900" spc="-1" strike="noStrike">
+                <a:solidFill>
+                  <a:srgbClr val="4a7480"/>
+                </a:solidFill>
+                <a:latin typeface="Calibri"/>
+              </a:rPr>
+              <a:t>ID généré automatiquement par OpenSearch</a:t>
+            </a:r>
+            <a:endParaRPr b="0" lang="fr-FR" sz="900" spc="-1" strike="noStrike">
+              <a:solidFill>
+                <a:srgbClr val="000000"/>
+              </a:solidFill>
+              <a:latin typeface="Arial"/>
+            </a:endParaRPr>
+          </a:p>
+        </p:txBody>
+      </p:sp>
+      <p:sp>
+        <p:nvSpPr>
+          <p:cNvPr id="72" name="Shape 516"/>
+          <p:cNvSpPr/>
+          <p:nvPr/>
+        </p:nvSpPr>
+        <p:spPr>
+          <a:xfrm>
+            <a:off x="274320" y="1673280"/>
+            <a:ext cx="1004040" cy="528480"/>
           </a:xfrm>
           <a:prstGeom prst="rect">
             <a:avLst/>
@@ -4391,14 +4982,14 @@
       </p:sp>
       <p:sp>
         <p:nvSpPr>
-          <p:cNvPr id="63" name="Text 478"/>
-          <p:cNvSpPr/>
-          <p:nvPr/>
-        </p:nvSpPr>
-        <p:spPr>
-          <a:xfrm>
-            <a:off x="7955280" y="155520"/>
-            <a:ext cx="1004760" cy="456120"/>
+          <p:cNvPr id="73" name="Text 483"/>
+          <p:cNvSpPr/>
+          <p:nvPr/>
+        </p:nvSpPr>
+        <p:spPr>
+          <a:xfrm>
+            <a:off x="274320" y="1673280"/>
+            <a:ext cx="1004040" cy="528480"/>
           </a:xfrm>
           <a:prstGeom prst="rect">
             <a:avLst/>
@@ -4428,118 +5019,13 @@
               </a:tabLst>
             </a:pPr>
             <a:r>
-              <a:rPr b="1" lang="en-US" sz="900" spc="-1" strike="noStrike">
-                <a:solidFill>
-                  <a:srgbClr val="00576b"/>
+              <a:rPr b="1" lang="en-US" sz="1000" spc="-1" strike="noStrike">
+                <a:solidFill>
+                  <a:srgbClr val="ffffff"/>
                 </a:solidFill>
                 <a:latin typeface="Calibri"/>
               </a:rPr>
-              <a:t>Module 2</a:t>
-            </a:r>
-            <a:endParaRPr b="0" lang="fr-FR" sz="900" spc="-1" strike="noStrike">
-              <a:solidFill>
-                <a:srgbClr val="000000"/>
-              </a:solidFill>
-              <a:latin typeface="Arial"/>
-            </a:endParaRPr>
-          </a:p>
-        </p:txBody>
-      </p:sp>
-      <p:sp>
-        <p:nvSpPr>
-          <p:cNvPr id="64" name="Shape 513"/>
-          <p:cNvSpPr/>
-          <p:nvPr/>
-        </p:nvSpPr>
-        <p:spPr>
-          <a:xfrm>
-            <a:off x="274320" y="987480"/>
-            <a:ext cx="1004760" cy="529200"/>
-          </a:xfrm>
-          <a:prstGeom prst="rect">
-            <a:avLst/>
-          </a:prstGeom>
-          <a:solidFill>
-            <a:srgbClr val="2e7d32"/>
-          </a:solidFill>
-          <a:ln w="12700">
-            <a:solidFill>
-              <a:srgbClr val="2e7d32"/>
-            </a:solidFill>
-            <a:round/>
-          </a:ln>
-        </p:spPr>
-        <p:style>
-          <a:lnRef idx="0"/>
-          <a:fillRef idx="0"/>
-          <a:effectRef idx="0"/>
-          <a:fontRef idx="minor"/>
-        </p:style>
-        <p:txBody>
-          <a:bodyPr lIns="90000" rIns="90000" tIns="45000" bIns="45000" anchor="t">
-            <a:noAutofit/>
-          </a:bodyPr>
-          <a:p>
-            <a:pPr>
-              <a:lnSpc>
-                <a:spcPct val="100000"/>
-              </a:lnSpc>
-            </a:pPr>
-            <a:endParaRPr b="0" lang="fr-FR" sz="1800" spc="-1" strike="noStrike">
-              <a:solidFill>
-                <a:srgbClr val="ffffff"/>
-              </a:solidFill>
-              <a:latin typeface="Arial"/>
-            </a:endParaRPr>
-          </a:p>
-        </p:txBody>
-      </p:sp>
-      <p:sp>
-        <p:nvSpPr>
-          <p:cNvPr id="65" name="Text 479"/>
-          <p:cNvSpPr/>
-          <p:nvPr/>
-        </p:nvSpPr>
-        <p:spPr>
-          <a:xfrm>
-            <a:off x="274320" y="987480"/>
-            <a:ext cx="1004760" cy="529200"/>
-          </a:xfrm>
-          <a:prstGeom prst="rect">
-            <a:avLst/>
-          </a:prstGeom>
-          <a:noFill/>
-          <a:ln w="0">
-            <a:noFill/>
-          </a:ln>
-        </p:spPr>
-        <p:style>
-          <a:lnRef idx="0"/>
-          <a:fillRef idx="0"/>
-          <a:effectRef idx="0"/>
-          <a:fontRef idx="minor"/>
-        </p:style>
-        <p:txBody>
-          <a:bodyPr lIns="0" rIns="0" tIns="0" bIns="0" anchor="ctr">
-            <a:noAutofit/>
-          </a:bodyPr>
-          <a:p>
-            <a:pPr algn="ctr" defTabSz="914400">
-              <a:lnSpc>
-                <a:spcPct val="100000"/>
-              </a:lnSpc>
-              <a:tabLst>
-                <a:tab algn="l" pos="0"/>
-              </a:tabLst>
-            </a:pPr>
-            <a:r>
-              <a:rPr b="1" lang="en-US" sz="1000" spc="-1" strike="noStrike">
-                <a:solidFill>
-                  <a:srgbClr val="ffffff"/>
-                </a:solidFill>
-                <a:latin typeface="Calibri"/>
-              </a:rPr>
-              <a:t>POST</a:t>
+              <a:t>PUT</a:t>
             </a:r>
             <a:endParaRPr b="0" lang="fr-FR" sz="1000" spc="-1" strike="noStrike">
               <a:solidFill>
@@ -4552,14 +5038,14 @@
       </p:sp>
       <p:sp>
         <p:nvSpPr>
-          <p:cNvPr id="66" name="Shape 514"/>
-          <p:cNvSpPr/>
-          <p:nvPr/>
-        </p:nvSpPr>
-        <p:spPr>
-          <a:xfrm>
-            <a:off x="1325880" y="987480"/>
-            <a:ext cx="2010600" cy="529200"/>
+          <p:cNvPr id="74" name="Shape 517"/>
+          <p:cNvSpPr/>
+          <p:nvPr/>
+        </p:nvSpPr>
+        <p:spPr>
+          <a:xfrm>
+            <a:off x="1325880" y="1673280"/>
+            <a:ext cx="2009880" cy="528480"/>
           </a:xfrm>
           <a:prstGeom prst="rect">
             <a:avLst/>
@@ -4601,14 +5087,14 @@
       </p:sp>
       <p:sp>
         <p:nvSpPr>
-          <p:cNvPr id="67" name="Text 480"/>
-          <p:cNvSpPr/>
-          <p:nvPr/>
-        </p:nvSpPr>
-        <p:spPr>
-          <a:xfrm>
-            <a:off x="1371600" y="987480"/>
-            <a:ext cx="1919160" cy="529200"/>
+          <p:cNvPr id="75" name="Text 484"/>
+          <p:cNvSpPr/>
+          <p:nvPr/>
+        </p:nvSpPr>
+        <p:spPr>
+          <a:xfrm>
+            <a:off x="1371600" y="1673280"/>
+            <a:ext cx="1918440" cy="528480"/>
           </a:xfrm>
           <a:prstGeom prst="rect">
             <a:avLst/>
@@ -4640,11 +5126,11 @@
             <a:r>
               <a:rPr b="1" lang="en-US" sz="1000" spc="-1" strike="noStrike">
                 <a:solidFill>
-                  <a:srgbClr val="2e7d32"/>
+                  <a:srgbClr val="007a8a"/>
                 </a:solidFill>
                 <a:latin typeface="Calibri"/>
               </a:rPr>
-              <a:t>Créer (ID auto)</a:t>
+              <a:t>Créer / Remplacer</a:t>
             </a:r>
             <a:endParaRPr b="0" lang="fr-FR" sz="1000" spc="-1" strike="noStrike">
               <a:solidFill>
@@ -4657,14 +5143,14 @@
       </p:sp>
       <p:sp>
         <p:nvSpPr>
-          <p:cNvPr id="68" name="Shape 515"/>
-          <p:cNvSpPr/>
-          <p:nvPr/>
-        </p:nvSpPr>
-        <p:spPr>
-          <a:xfrm>
-            <a:off x="3383280" y="987480"/>
-            <a:ext cx="2467800" cy="529200"/>
+          <p:cNvPr id="76" name="Shape 518"/>
+          <p:cNvSpPr/>
+          <p:nvPr/>
+        </p:nvSpPr>
+        <p:spPr>
+          <a:xfrm>
+            <a:off x="3383280" y="1673280"/>
+            <a:ext cx="2467080" cy="528480"/>
           </a:xfrm>
           <a:prstGeom prst="rect">
             <a:avLst/>
@@ -4706,14 +5192,14 @@
       </p:sp>
       <p:sp>
         <p:nvSpPr>
-          <p:cNvPr id="69" name="Text 481"/>
-          <p:cNvSpPr/>
-          <p:nvPr/>
-        </p:nvSpPr>
-        <p:spPr>
-          <a:xfrm>
-            <a:off x="3429000" y="987480"/>
-            <a:ext cx="2376360" cy="529200"/>
+          <p:cNvPr id="77" name="Text 485"/>
+          <p:cNvSpPr/>
+          <p:nvPr/>
+        </p:nvSpPr>
+        <p:spPr>
+          <a:xfrm>
+            <a:off x="3429000" y="1673280"/>
+            <a:ext cx="2375640" cy="528480"/>
           </a:xfrm>
           <a:prstGeom prst="rect">
             <a:avLst/>
@@ -4750,7 +5236,7 @@
                 <a:latin typeface="Consolas"/>
                 <a:ea typeface="Consolas"/>
               </a:rPr>
-              <a:t>POST /mon-index/_doc</a:t>
+              <a:t>PUT /mon-index/_doc/{id}</a:t>
             </a:r>
             <a:endParaRPr b="0" lang="fr-FR" sz="850" spc="-1" strike="noStrike">
               <a:solidFill>
@@ -4763,14 +5249,14 @@
       </p:sp>
       <p:sp>
         <p:nvSpPr>
-          <p:cNvPr id="70" name="Text 482"/>
-          <p:cNvSpPr/>
-          <p:nvPr/>
-        </p:nvSpPr>
-        <p:spPr>
-          <a:xfrm>
-            <a:off x="5943600" y="987480"/>
-            <a:ext cx="2925000" cy="529200"/>
+          <p:cNvPr id="78" name="Text 486"/>
+          <p:cNvSpPr/>
+          <p:nvPr/>
+        </p:nvSpPr>
+        <p:spPr>
+          <a:xfrm>
+            <a:off x="5943600" y="1673280"/>
+            <a:ext cx="2924280" cy="528480"/>
           </a:xfrm>
           <a:prstGeom prst="rect">
             <a:avLst/>
@@ -4806,7 +5292,7 @@
                 </a:solidFill>
                 <a:latin typeface="Calibri"/>
               </a:rPr>
-              <a:t>ID généré automatiquement par OpenSearch</a:t>
+              <a:t>Crée ou remplace le document entier — _version incrémenté</a:t>
             </a:r>
             <a:endParaRPr b="0" lang="fr-FR" sz="900" spc="-1" strike="noStrike">
               <a:solidFill>
@@ -4819,24 +5305,24 @@
       </p:sp>
       <p:sp>
         <p:nvSpPr>
-          <p:cNvPr id="71" name="Shape 516"/>
-          <p:cNvSpPr/>
-          <p:nvPr/>
-        </p:nvSpPr>
-        <p:spPr>
-          <a:xfrm>
-            <a:off x="274320" y="1673280"/>
-            <a:ext cx="1004760" cy="529200"/>
+          <p:cNvPr id="79" name="Shape 519"/>
+          <p:cNvSpPr/>
+          <p:nvPr/>
+        </p:nvSpPr>
+        <p:spPr>
+          <a:xfrm>
+            <a:off x="274320" y="2359080"/>
+            <a:ext cx="1004040" cy="528480"/>
           </a:xfrm>
           <a:prstGeom prst="rect">
             <a:avLst/>
           </a:prstGeom>
           <a:solidFill>
-            <a:srgbClr val="007a8a"/>
+            <a:srgbClr val="00576b"/>
           </a:solidFill>
           <a:ln w="12700">
             <a:solidFill>
-              <a:srgbClr val="007a8a"/>
+              <a:srgbClr val="00576b"/>
             </a:solidFill>
             <a:round/>
           </a:ln>
@@ -4868,14 +5354,14 @@
       </p:sp>
       <p:sp>
         <p:nvSpPr>
-          <p:cNvPr id="72" name="Text 483"/>
-          <p:cNvSpPr/>
-          <p:nvPr/>
-        </p:nvSpPr>
-        <p:spPr>
-          <a:xfrm>
-            <a:off x="274320" y="1673280"/>
-            <a:ext cx="1004760" cy="529200"/>
+          <p:cNvPr id="80" name="Text 487"/>
+          <p:cNvSpPr/>
+          <p:nvPr/>
+        </p:nvSpPr>
+        <p:spPr>
+          <a:xfrm>
+            <a:off x="274320" y="2359080"/>
+            <a:ext cx="1004040" cy="528480"/>
           </a:xfrm>
           <a:prstGeom prst="rect">
             <a:avLst/>
@@ -4911,7 +5397,7 @@
                 </a:solidFill>
                 <a:latin typeface="Calibri"/>
               </a:rPr>
-              <a:t>PUT</a:t>
+              <a:t>GET</a:t>
             </a:r>
             <a:endParaRPr b="0" lang="fr-FR" sz="1000" spc="-1" strike="noStrike">
               <a:solidFill>
@@ -4924,14 +5410,14 @@
       </p:sp>
       <p:sp>
         <p:nvSpPr>
-          <p:cNvPr id="73" name="Shape 517"/>
-          <p:cNvSpPr/>
-          <p:nvPr/>
-        </p:nvSpPr>
-        <p:spPr>
-          <a:xfrm>
-            <a:off x="1325880" y="1673280"/>
-            <a:ext cx="2010600" cy="529200"/>
+          <p:cNvPr id="81" name="Shape 520"/>
+          <p:cNvSpPr/>
+          <p:nvPr/>
+        </p:nvSpPr>
+        <p:spPr>
+          <a:xfrm>
+            <a:off x="1325880" y="2359080"/>
+            <a:ext cx="2009880" cy="528480"/>
           </a:xfrm>
           <a:prstGeom prst="rect">
             <a:avLst/>
@@ -4973,14 +5459,14 @@
       </p:sp>
       <p:sp>
         <p:nvSpPr>
-          <p:cNvPr id="74" name="Text 484"/>
-          <p:cNvSpPr/>
-          <p:nvPr/>
-        </p:nvSpPr>
-        <p:spPr>
-          <a:xfrm>
-            <a:off x="1371600" y="1673280"/>
-            <a:ext cx="1919160" cy="529200"/>
+          <p:cNvPr id="82" name="Text 488"/>
+          <p:cNvSpPr/>
+          <p:nvPr/>
+        </p:nvSpPr>
+        <p:spPr>
+          <a:xfrm>
+            <a:off x="1371600" y="2359080"/>
+            <a:ext cx="1918440" cy="528480"/>
           </a:xfrm>
           <a:prstGeom prst="rect">
             <a:avLst/>
@@ -5012,11 +5498,11 @@
             <a:r>
               <a:rPr b="1" lang="en-US" sz="1000" spc="-1" strike="noStrike">
                 <a:solidFill>
-                  <a:srgbClr val="007a8a"/>
+                  <a:srgbClr val="00576b"/>
                 </a:solidFill>
                 <a:latin typeface="Calibri"/>
               </a:rPr>
-              <a:t>Créer / Remplacer</a:t>
+              <a:t>Récupérer</a:t>
             </a:r>
             <a:endParaRPr b="0" lang="fr-FR" sz="1000" spc="-1" strike="noStrike">
               <a:solidFill>
@@ -5029,14 +5515,14 @@
       </p:sp>
       <p:sp>
         <p:nvSpPr>
-          <p:cNvPr id="75" name="Shape 518"/>
-          <p:cNvSpPr/>
-          <p:nvPr/>
-        </p:nvSpPr>
-        <p:spPr>
-          <a:xfrm>
-            <a:off x="3383280" y="1673280"/>
-            <a:ext cx="2467800" cy="529200"/>
+          <p:cNvPr id="83" name="Shape 521"/>
+          <p:cNvSpPr/>
+          <p:nvPr/>
+        </p:nvSpPr>
+        <p:spPr>
+          <a:xfrm>
+            <a:off x="3383280" y="2359080"/>
+            <a:ext cx="2467080" cy="528480"/>
           </a:xfrm>
           <a:prstGeom prst="rect">
             <a:avLst/>
@@ -5078,14 +5564,14 @@
       </p:sp>
       <p:sp>
         <p:nvSpPr>
-          <p:cNvPr id="76" name="Text 485"/>
-          <p:cNvSpPr/>
-          <p:nvPr/>
-        </p:nvSpPr>
-        <p:spPr>
-          <a:xfrm>
-            <a:off x="3429000" y="1673280"/>
-            <a:ext cx="2376360" cy="529200"/>
+          <p:cNvPr id="84" name="Text 489"/>
+          <p:cNvSpPr/>
+          <p:nvPr/>
+        </p:nvSpPr>
+        <p:spPr>
+          <a:xfrm>
+            <a:off x="3429000" y="2359080"/>
+            <a:ext cx="2375640" cy="528480"/>
           </a:xfrm>
           <a:prstGeom prst="rect">
             <a:avLst/>
@@ -5122,7 +5608,7 @@
                 <a:latin typeface="Consolas"/>
                 <a:ea typeface="Consolas"/>
               </a:rPr>
-              <a:t>PUT /mon-index/_doc/{id}</a:t>
+              <a:t>GET /mon-index/_doc/{id}</a:t>
             </a:r>
             <a:endParaRPr b="0" lang="fr-FR" sz="850" spc="-1" strike="noStrike">
               <a:solidFill>
@@ -5135,14 +5621,14 @@
       </p:sp>
       <p:sp>
         <p:nvSpPr>
-          <p:cNvPr id="77" name="Text 486"/>
-          <p:cNvSpPr/>
-          <p:nvPr/>
-        </p:nvSpPr>
-        <p:spPr>
-          <a:xfrm>
-            <a:off x="5943600" y="1673280"/>
-            <a:ext cx="2925000" cy="529200"/>
+          <p:cNvPr id="85" name="Text 490"/>
+          <p:cNvSpPr/>
+          <p:nvPr/>
+        </p:nvSpPr>
+        <p:spPr>
+          <a:xfrm>
+            <a:off x="5943600" y="2359080"/>
+            <a:ext cx="2924280" cy="528480"/>
           </a:xfrm>
           <a:prstGeom prst="rect">
             <a:avLst/>
@@ -5178,7 +5664,7 @@
                 </a:solidFill>
                 <a:latin typeface="Calibri"/>
               </a:rPr>
-              <a:t>Crée ou remplace le document entier — _version incrémenté</a:t>
+              <a:t>Retourne _index, _id, _version, _source</a:t>
             </a:r>
             <a:endParaRPr b="0" lang="fr-FR" sz="900" spc="-1" strike="noStrike">
               <a:solidFill>
@@ -5191,14 +5677,758 @@
       </p:sp>
       <p:sp>
         <p:nvSpPr>
-          <p:cNvPr id="78" name="Shape 519"/>
-          <p:cNvSpPr/>
-          <p:nvPr/>
-        </p:nvSpPr>
-        <p:spPr>
-          <a:xfrm>
-            <a:off x="274320" y="2359080"/>
-            <a:ext cx="1004760" cy="529200"/>
+          <p:cNvPr id="86" name="Shape 522"/>
+          <p:cNvSpPr/>
+          <p:nvPr/>
+        </p:nvSpPr>
+        <p:spPr>
+          <a:xfrm>
+            <a:off x="274320" y="3044880"/>
+            <a:ext cx="1004040" cy="528480"/>
+          </a:xfrm>
+          <a:prstGeom prst="rect">
+            <a:avLst/>
+          </a:prstGeom>
+          <a:solidFill>
+            <a:srgbClr val="ef4444"/>
+          </a:solidFill>
+          <a:ln w="12700">
+            <a:solidFill>
+              <a:srgbClr val="ef4444"/>
+            </a:solidFill>
+            <a:round/>
+          </a:ln>
+        </p:spPr>
+        <p:style>
+          <a:lnRef idx="0"/>
+          <a:fillRef idx="0"/>
+          <a:effectRef idx="0"/>
+          <a:fontRef idx="minor"/>
+        </p:style>
+        <p:txBody>
+          <a:bodyPr lIns="90000" rIns="90000" tIns="45000" bIns="45000" anchor="t">
+            <a:noAutofit/>
+          </a:bodyPr>
+          <a:p>
+            <a:pPr>
+              <a:lnSpc>
+                <a:spcPct val="100000"/>
+              </a:lnSpc>
+            </a:pPr>
+            <a:endParaRPr b="0" lang="fr-FR" sz="1800" spc="-1" strike="noStrike">
+              <a:solidFill>
+                <a:srgbClr val="ffffff"/>
+              </a:solidFill>
+              <a:latin typeface="Arial"/>
+            </a:endParaRPr>
+          </a:p>
+        </p:txBody>
+      </p:sp>
+      <p:sp>
+        <p:nvSpPr>
+          <p:cNvPr id="87" name="Text 491"/>
+          <p:cNvSpPr/>
+          <p:nvPr/>
+        </p:nvSpPr>
+        <p:spPr>
+          <a:xfrm>
+            <a:off x="274320" y="3044880"/>
+            <a:ext cx="1004040" cy="528480"/>
+          </a:xfrm>
+          <a:prstGeom prst="rect">
+            <a:avLst/>
+          </a:prstGeom>
+          <a:noFill/>
+          <a:ln w="0">
+            <a:noFill/>
+          </a:ln>
+        </p:spPr>
+        <p:style>
+          <a:lnRef idx="0"/>
+          <a:fillRef idx="0"/>
+          <a:effectRef idx="0"/>
+          <a:fontRef idx="minor"/>
+        </p:style>
+        <p:txBody>
+          <a:bodyPr lIns="0" rIns="0" tIns="0" bIns="0" anchor="ctr">
+            <a:noAutofit/>
+          </a:bodyPr>
+          <a:p>
+            <a:pPr algn="ctr" defTabSz="914400">
+              <a:lnSpc>
+                <a:spcPct val="100000"/>
+              </a:lnSpc>
+              <a:tabLst>
+                <a:tab algn="l" pos="0"/>
+              </a:tabLst>
+            </a:pPr>
+            <a:r>
+              <a:rPr b="1" lang="en-US" sz="1000" spc="-1" strike="noStrike">
+                <a:solidFill>
+                  <a:srgbClr val="ffffff"/>
+                </a:solidFill>
+                <a:latin typeface="Calibri"/>
+              </a:rPr>
+              <a:t>DELETE</a:t>
+            </a:r>
+            <a:endParaRPr b="0" lang="fr-FR" sz="1000" spc="-1" strike="noStrike">
+              <a:solidFill>
+                <a:srgbClr val="000000"/>
+              </a:solidFill>
+              <a:latin typeface="Arial"/>
+            </a:endParaRPr>
+          </a:p>
+        </p:txBody>
+      </p:sp>
+      <p:sp>
+        <p:nvSpPr>
+          <p:cNvPr id="88" name="Shape 523"/>
+          <p:cNvSpPr/>
+          <p:nvPr/>
+        </p:nvSpPr>
+        <p:spPr>
+          <a:xfrm>
+            <a:off x="1325880" y="3044880"/>
+            <a:ext cx="2009880" cy="528480"/>
+          </a:xfrm>
+          <a:prstGeom prst="rect">
+            <a:avLst/>
+          </a:prstGeom>
+          <a:solidFill>
+            <a:srgbClr val="f5f9fa"/>
+          </a:solidFill>
+          <a:ln w="12700">
+            <a:solidFill>
+              <a:srgbClr val="eaf4f6"/>
+            </a:solidFill>
+            <a:round/>
+          </a:ln>
+        </p:spPr>
+        <p:style>
+          <a:lnRef idx="0"/>
+          <a:fillRef idx="0"/>
+          <a:effectRef idx="0"/>
+          <a:fontRef idx="minor"/>
+        </p:style>
+        <p:txBody>
+          <a:bodyPr lIns="90000" rIns="90000" tIns="45000" bIns="45000" anchor="t">
+            <a:noAutofit/>
+          </a:bodyPr>
+          <a:p>
+            <a:pPr>
+              <a:lnSpc>
+                <a:spcPct val="100000"/>
+              </a:lnSpc>
+            </a:pPr>
+            <a:endParaRPr b="0" lang="fr-FR" sz="1800" spc="-1" strike="noStrike">
+              <a:solidFill>
+                <a:srgbClr val="000000"/>
+              </a:solidFill>
+              <a:latin typeface="Arial"/>
+            </a:endParaRPr>
+          </a:p>
+        </p:txBody>
+      </p:sp>
+      <p:sp>
+        <p:nvSpPr>
+          <p:cNvPr id="89" name="Text 492"/>
+          <p:cNvSpPr/>
+          <p:nvPr/>
+        </p:nvSpPr>
+        <p:spPr>
+          <a:xfrm>
+            <a:off x="1371600" y="3044880"/>
+            <a:ext cx="1918440" cy="528480"/>
+          </a:xfrm>
+          <a:prstGeom prst="rect">
+            <a:avLst/>
+          </a:prstGeom>
+          <a:noFill/>
+          <a:ln w="0">
+            <a:noFill/>
+          </a:ln>
+        </p:spPr>
+        <p:style>
+          <a:lnRef idx="0"/>
+          <a:fillRef idx="0"/>
+          <a:effectRef idx="0"/>
+          <a:fontRef idx="minor"/>
+        </p:style>
+        <p:txBody>
+          <a:bodyPr lIns="90000" rIns="90000" tIns="45000" bIns="45000" anchor="ctr">
+            <a:noAutofit/>
+          </a:bodyPr>
+          <a:p>
+            <a:pPr defTabSz="914400">
+              <a:lnSpc>
+                <a:spcPct val="100000"/>
+              </a:lnSpc>
+              <a:tabLst>
+                <a:tab algn="l" pos="0"/>
+              </a:tabLst>
+            </a:pPr>
+            <a:r>
+              <a:rPr b="1" lang="en-US" sz="1000" spc="-1" strike="noStrike">
+                <a:solidFill>
+                  <a:srgbClr val="ef4444"/>
+                </a:solidFill>
+                <a:latin typeface="Calibri"/>
+              </a:rPr>
+              <a:t>Supprimer</a:t>
+            </a:r>
+            <a:endParaRPr b="0" lang="fr-FR" sz="1000" spc="-1" strike="noStrike">
+              <a:solidFill>
+                <a:srgbClr val="000000"/>
+              </a:solidFill>
+              <a:latin typeface="Arial"/>
+            </a:endParaRPr>
+          </a:p>
+        </p:txBody>
+      </p:sp>
+      <p:sp>
+        <p:nvSpPr>
+          <p:cNvPr id="90" name="Shape 524"/>
+          <p:cNvSpPr/>
+          <p:nvPr/>
+        </p:nvSpPr>
+        <p:spPr>
+          <a:xfrm>
+            <a:off x="3383280" y="3044880"/>
+            <a:ext cx="2467080" cy="528480"/>
+          </a:xfrm>
+          <a:prstGeom prst="rect">
+            <a:avLst/>
+          </a:prstGeom>
+          <a:solidFill>
+            <a:srgbClr val="1a2b2f"/>
+          </a:solidFill>
+          <a:ln w="12700">
+            <a:solidFill>
+              <a:srgbClr val="1a2b2f"/>
+            </a:solidFill>
+            <a:round/>
+          </a:ln>
+        </p:spPr>
+        <p:style>
+          <a:lnRef idx="0"/>
+          <a:fillRef idx="0"/>
+          <a:effectRef idx="0"/>
+          <a:fontRef idx="minor"/>
+        </p:style>
+        <p:txBody>
+          <a:bodyPr lIns="90000" rIns="90000" tIns="45000" bIns="45000" anchor="t">
+            <a:noAutofit/>
+          </a:bodyPr>
+          <a:p>
+            <a:pPr>
+              <a:lnSpc>
+                <a:spcPct val="100000"/>
+              </a:lnSpc>
+            </a:pPr>
+            <a:endParaRPr b="0" lang="fr-FR" sz="1800" spc="-1" strike="noStrike">
+              <a:solidFill>
+                <a:srgbClr val="ffffff"/>
+              </a:solidFill>
+              <a:latin typeface="Arial"/>
+            </a:endParaRPr>
+          </a:p>
+        </p:txBody>
+      </p:sp>
+      <p:sp>
+        <p:nvSpPr>
+          <p:cNvPr id="91" name="Text 493"/>
+          <p:cNvSpPr/>
+          <p:nvPr/>
+        </p:nvSpPr>
+        <p:spPr>
+          <a:xfrm>
+            <a:off x="3429000" y="3044880"/>
+            <a:ext cx="2375640" cy="528480"/>
+          </a:xfrm>
+          <a:prstGeom prst="rect">
+            <a:avLst/>
+          </a:prstGeom>
+          <a:noFill/>
+          <a:ln w="0">
+            <a:noFill/>
+          </a:ln>
+        </p:spPr>
+        <p:style>
+          <a:lnRef idx="0"/>
+          <a:fillRef idx="0"/>
+          <a:effectRef idx="0"/>
+          <a:fontRef idx="minor"/>
+        </p:style>
+        <p:txBody>
+          <a:bodyPr lIns="90000" rIns="90000" tIns="45000" bIns="45000" anchor="ctr">
+            <a:noAutofit/>
+          </a:bodyPr>
+          <a:p>
+            <a:pPr defTabSz="914400">
+              <a:lnSpc>
+                <a:spcPct val="100000"/>
+              </a:lnSpc>
+              <a:tabLst>
+                <a:tab algn="l" pos="0"/>
+              </a:tabLst>
+            </a:pPr>
+            <a:r>
+              <a:rPr b="0" lang="en-US" sz="850" spc="-1" strike="noStrike">
+                <a:solidFill>
+                  <a:srgbClr val="a8d4dc"/>
+                </a:solidFill>
+                <a:latin typeface="Consolas"/>
+                <a:ea typeface="Consolas"/>
+              </a:rPr>
+              <a:t>DELETE /mon-index/_doc/{id}</a:t>
+            </a:r>
+            <a:endParaRPr b="0" lang="fr-FR" sz="850" spc="-1" strike="noStrike">
+              <a:solidFill>
+                <a:srgbClr val="000000"/>
+              </a:solidFill>
+              <a:latin typeface="Arial"/>
+            </a:endParaRPr>
+          </a:p>
+        </p:txBody>
+      </p:sp>
+      <p:sp>
+        <p:nvSpPr>
+          <p:cNvPr id="92" name="Text 494"/>
+          <p:cNvSpPr/>
+          <p:nvPr/>
+        </p:nvSpPr>
+        <p:spPr>
+          <a:xfrm>
+            <a:off x="5943600" y="3044880"/>
+            <a:ext cx="2924280" cy="528480"/>
+          </a:xfrm>
+          <a:prstGeom prst="rect">
+            <a:avLst/>
+          </a:prstGeom>
+          <a:noFill/>
+          <a:ln w="0">
+            <a:noFill/>
+          </a:ln>
+        </p:spPr>
+        <p:style>
+          <a:lnRef idx="0"/>
+          <a:fillRef idx="0"/>
+          <a:effectRef idx="0"/>
+          <a:fontRef idx="minor"/>
+        </p:style>
+        <p:txBody>
+          <a:bodyPr lIns="90000" rIns="90000" tIns="45000" bIns="45000" anchor="ctr">
+            <a:noAutofit/>
+          </a:bodyPr>
+          <a:p>
+            <a:pPr defTabSz="914400">
+              <a:lnSpc>
+                <a:spcPct val="100000"/>
+              </a:lnSpc>
+              <a:tabLst>
+                <a:tab algn="l" pos="0"/>
+              </a:tabLst>
+            </a:pPr>
+            <a:r>
+              <a:rPr b="0" i="1" lang="en-US" sz="900" spc="-1" strike="noStrike">
+                <a:solidFill>
+                  <a:srgbClr val="4a7480"/>
+                </a:solidFill>
+                <a:latin typeface="Calibri"/>
+              </a:rPr>
+              <a:t>Suppression asynchrone — répliques supprimées en batch</a:t>
+            </a:r>
+            <a:endParaRPr b="0" lang="fr-FR" sz="900" spc="-1" strike="noStrike">
+              <a:solidFill>
+                <a:srgbClr val="000000"/>
+              </a:solidFill>
+              <a:latin typeface="Arial"/>
+            </a:endParaRPr>
+          </a:p>
+        </p:txBody>
+      </p:sp>
+      <p:sp>
+        <p:nvSpPr>
+          <p:cNvPr id="93" name="Shape 525"/>
+          <p:cNvSpPr/>
+          <p:nvPr/>
+        </p:nvSpPr>
+        <p:spPr>
+          <a:xfrm>
+            <a:off x="274320" y="3730680"/>
+            <a:ext cx="1004040" cy="528480"/>
+          </a:xfrm>
+          <a:prstGeom prst="rect">
+            <a:avLst/>
+          </a:prstGeom>
+          <a:solidFill>
+            <a:srgbClr val="e8834a"/>
+          </a:solidFill>
+          <a:ln w="12700">
+            <a:solidFill>
+              <a:srgbClr val="e8834a"/>
+            </a:solidFill>
+            <a:round/>
+          </a:ln>
+        </p:spPr>
+        <p:style>
+          <a:lnRef idx="0"/>
+          <a:fillRef idx="0"/>
+          <a:effectRef idx="0"/>
+          <a:fontRef idx="minor"/>
+        </p:style>
+        <p:txBody>
+          <a:bodyPr lIns="90000" rIns="90000" tIns="45000" bIns="45000" anchor="t">
+            <a:noAutofit/>
+          </a:bodyPr>
+          <a:p>
+            <a:pPr>
+              <a:lnSpc>
+                <a:spcPct val="100000"/>
+              </a:lnSpc>
+            </a:pPr>
+            <a:endParaRPr b="0" lang="fr-FR" sz="1800" spc="-1" strike="noStrike">
+              <a:solidFill>
+                <a:srgbClr val="000000"/>
+              </a:solidFill>
+              <a:latin typeface="Arial"/>
+            </a:endParaRPr>
+          </a:p>
+        </p:txBody>
+      </p:sp>
+      <p:sp>
+        <p:nvSpPr>
+          <p:cNvPr id="94" name="Text 495"/>
+          <p:cNvSpPr/>
+          <p:nvPr/>
+        </p:nvSpPr>
+        <p:spPr>
+          <a:xfrm>
+            <a:off x="274320" y="3730680"/>
+            <a:ext cx="1004040" cy="528480"/>
+          </a:xfrm>
+          <a:prstGeom prst="rect">
+            <a:avLst/>
+          </a:prstGeom>
+          <a:noFill/>
+          <a:ln w="0">
+            <a:noFill/>
+          </a:ln>
+        </p:spPr>
+        <p:style>
+          <a:lnRef idx="0"/>
+          <a:fillRef idx="0"/>
+          <a:effectRef idx="0"/>
+          <a:fontRef idx="minor"/>
+        </p:style>
+        <p:txBody>
+          <a:bodyPr lIns="0" rIns="0" tIns="0" bIns="0" anchor="ctr">
+            <a:noAutofit/>
+          </a:bodyPr>
+          <a:p>
+            <a:pPr algn="ctr" defTabSz="914400">
+              <a:lnSpc>
+                <a:spcPct val="100000"/>
+              </a:lnSpc>
+              <a:tabLst>
+                <a:tab algn="l" pos="0"/>
+              </a:tabLst>
+            </a:pPr>
+            <a:r>
+              <a:rPr b="1" lang="en-US" sz="1000" spc="-1" strike="noStrike">
+                <a:solidFill>
+                  <a:srgbClr val="ffffff"/>
+                </a:solidFill>
+                <a:latin typeface="Calibri"/>
+              </a:rPr>
+              <a:t>POST</a:t>
+            </a:r>
+            <a:endParaRPr b="0" lang="fr-FR" sz="1000" spc="-1" strike="noStrike">
+              <a:solidFill>
+                <a:srgbClr val="000000"/>
+              </a:solidFill>
+              <a:latin typeface="Arial"/>
+            </a:endParaRPr>
+          </a:p>
+        </p:txBody>
+      </p:sp>
+      <p:sp>
+        <p:nvSpPr>
+          <p:cNvPr id="95" name="Shape 526"/>
+          <p:cNvSpPr/>
+          <p:nvPr/>
+        </p:nvSpPr>
+        <p:spPr>
+          <a:xfrm>
+            <a:off x="1325880" y="3730680"/>
+            <a:ext cx="2009880" cy="528480"/>
+          </a:xfrm>
+          <a:prstGeom prst="rect">
+            <a:avLst/>
+          </a:prstGeom>
+          <a:solidFill>
+            <a:srgbClr val="f5f9fa"/>
+          </a:solidFill>
+          <a:ln w="12700">
+            <a:solidFill>
+              <a:srgbClr val="eaf4f6"/>
+            </a:solidFill>
+            <a:round/>
+          </a:ln>
+        </p:spPr>
+        <p:style>
+          <a:lnRef idx="0"/>
+          <a:fillRef idx="0"/>
+          <a:effectRef idx="0"/>
+          <a:fontRef idx="minor"/>
+        </p:style>
+        <p:txBody>
+          <a:bodyPr lIns="90000" rIns="90000" tIns="45000" bIns="45000" anchor="t">
+            <a:noAutofit/>
+          </a:bodyPr>
+          <a:p>
+            <a:pPr>
+              <a:lnSpc>
+                <a:spcPct val="100000"/>
+              </a:lnSpc>
+            </a:pPr>
+            <a:endParaRPr b="0" lang="fr-FR" sz="1800" spc="-1" strike="noStrike">
+              <a:solidFill>
+                <a:srgbClr val="000000"/>
+              </a:solidFill>
+              <a:latin typeface="Arial"/>
+            </a:endParaRPr>
+          </a:p>
+        </p:txBody>
+      </p:sp>
+      <p:sp>
+        <p:nvSpPr>
+          <p:cNvPr id="96" name="Text 496"/>
+          <p:cNvSpPr/>
+          <p:nvPr/>
+        </p:nvSpPr>
+        <p:spPr>
+          <a:xfrm>
+            <a:off x="1371600" y="3730680"/>
+            <a:ext cx="1918440" cy="528480"/>
+          </a:xfrm>
+          <a:prstGeom prst="rect">
+            <a:avLst/>
+          </a:prstGeom>
+          <a:noFill/>
+          <a:ln w="0">
+            <a:noFill/>
+          </a:ln>
+        </p:spPr>
+        <p:style>
+          <a:lnRef idx="0"/>
+          <a:fillRef idx="0"/>
+          <a:effectRef idx="0"/>
+          <a:fontRef idx="minor"/>
+        </p:style>
+        <p:txBody>
+          <a:bodyPr lIns="90000" rIns="90000" tIns="45000" bIns="45000" anchor="ctr">
+            <a:noAutofit/>
+          </a:bodyPr>
+          <a:p>
+            <a:pPr defTabSz="914400">
+              <a:lnSpc>
+                <a:spcPct val="100000"/>
+              </a:lnSpc>
+              <a:tabLst>
+                <a:tab algn="l" pos="0"/>
+              </a:tabLst>
+            </a:pPr>
+            <a:r>
+              <a:rPr b="1" lang="en-US" sz="1000" spc="-1" strike="noStrike">
+                <a:solidFill>
+                  <a:srgbClr val="e8834a"/>
+                </a:solidFill>
+                <a:latin typeface="Calibri"/>
+              </a:rPr>
+              <a:t>Mise à jour partielle</a:t>
+            </a:r>
+            <a:endParaRPr b="0" lang="fr-FR" sz="1000" spc="-1" strike="noStrike">
+              <a:solidFill>
+                <a:srgbClr val="000000"/>
+              </a:solidFill>
+              <a:latin typeface="Arial"/>
+            </a:endParaRPr>
+          </a:p>
+        </p:txBody>
+      </p:sp>
+      <p:sp>
+        <p:nvSpPr>
+          <p:cNvPr id="97" name="Shape 527"/>
+          <p:cNvSpPr/>
+          <p:nvPr/>
+        </p:nvSpPr>
+        <p:spPr>
+          <a:xfrm>
+            <a:off x="3383280" y="3730680"/>
+            <a:ext cx="2467080" cy="528480"/>
+          </a:xfrm>
+          <a:prstGeom prst="rect">
+            <a:avLst/>
+          </a:prstGeom>
+          <a:solidFill>
+            <a:srgbClr val="1a2b2f"/>
+          </a:solidFill>
+          <a:ln w="12700">
+            <a:solidFill>
+              <a:srgbClr val="1a2b2f"/>
+            </a:solidFill>
+            <a:round/>
+          </a:ln>
+        </p:spPr>
+        <p:style>
+          <a:lnRef idx="0"/>
+          <a:fillRef idx="0"/>
+          <a:effectRef idx="0"/>
+          <a:fontRef idx="minor"/>
+        </p:style>
+        <p:txBody>
+          <a:bodyPr lIns="90000" rIns="90000" tIns="45000" bIns="45000" anchor="t">
+            <a:noAutofit/>
+          </a:bodyPr>
+          <a:p>
+            <a:pPr>
+              <a:lnSpc>
+                <a:spcPct val="100000"/>
+              </a:lnSpc>
+            </a:pPr>
+            <a:endParaRPr b="0" lang="fr-FR" sz="1800" spc="-1" strike="noStrike">
+              <a:solidFill>
+                <a:srgbClr val="ffffff"/>
+              </a:solidFill>
+              <a:latin typeface="Arial"/>
+            </a:endParaRPr>
+          </a:p>
+        </p:txBody>
+      </p:sp>
+      <p:sp>
+        <p:nvSpPr>
+          <p:cNvPr id="98" name="Text 497"/>
+          <p:cNvSpPr/>
+          <p:nvPr/>
+        </p:nvSpPr>
+        <p:spPr>
+          <a:xfrm>
+            <a:off x="3429000" y="3730680"/>
+            <a:ext cx="2375640" cy="528480"/>
+          </a:xfrm>
+          <a:prstGeom prst="rect">
+            <a:avLst/>
+          </a:prstGeom>
+          <a:noFill/>
+          <a:ln w="0">
+            <a:noFill/>
+          </a:ln>
+        </p:spPr>
+        <p:style>
+          <a:lnRef idx="0"/>
+          <a:fillRef idx="0"/>
+          <a:effectRef idx="0"/>
+          <a:fontRef idx="minor"/>
+        </p:style>
+        <p:txBody>
+          <a:bodyPr lIns="90000" rIns="90000" tIns="45000" bIns="45000" anchor="ctr">
+            <a:noAutofit/>
+          </a:bodyPr>
+          <a:p>
+            <a:pPr defTabSz="914400">
+              <a:lnSpc>
+                <a:spcPct val="100000"/>
+              </a:lnSpc>
+              <a:tabLst>
+                <a:tab algn="l" pos="0"/>
+              </a:tabLst>
+            </a:pPr>
+            <a:r>
+              <a:rPr b="0" lang="en-US" sz="850" spc="-1" strike="noStrike">
+                <a:solidFill>
+                  <a:srgbClr val="a8d4dc"/>
+                </a:solidFill>
+                <a:latin typeface="Consolas"/>
+                <a:ea typeface="Consolas"/>
+              </a:rPr>
+              <a:t>POST /mon-index/_update/{id}</a:t>
+            </a:r>
+            <a:endParaRPr b="0" lang="fr-FR" sz="850" spc="-1" strike="noStrike">
+              <a:solidFill>
+                <a:srgbClr val="000000"/>
+              </a:solidFill>
+              <a:latin typeface="Arial"/>
+            </a:endParaRPr>
+          </a:p>
+        </p:txBody>
+      </p:sp>
+      <p:sp>
+        <p:nvSpPr>
+          <p:cNvPr id="99" name="Text 498"/>
+          <p:cNvSpPr/>
+          <p:nvPr/>
+        </p:nvSpPr>
+        <p:spPr>
+          <a:xfrm>
+            <a:off x="5943600" y="3730680"/>
+            <a:ext cx="2924280" cy="528480"/>
+          </a:xfrm>
+          <a:prstGeom prst="rect">
+            <a:avLst/>
+          </a:prstGeom>
+          <a:noFill/>
+          <a:ln w="0">
+            <a:noFill/>
+          </a:ln>
+        </p:spPr>
+        <p:style>
+          <a:lnRef idx="0"/>
+          <a:fillRef idx="0"/>
+          <a:effectRef idx="0"/>
+          <a:fontRef idx="minor"/>
+        </p:style>
+        <p:txBody>
+          <a:bodyPr lIns="90000" rIns="90000" tIns="45000" bIns="45000" anchor="ctr">
+            <a:noAutofit/>
+          </a:bodyPr>
+          <a:p>
+            <a:pPr defTabSz="914400">
+              <a:lnSpc>
+                <a:spcPct val="100000"/>
+              </a:lnSpc>
+              <a:tabLst>
+                <a:tab algn="l" pos="0"/>
+              </a:tabLst>
+            </a:pPr>
+            <a:r>
+              <a:rPr b="0" i="1" lang="en-US" sz="900" spc="-1" strike="noStrike">
+                <a:solidFill>
+                  <a:srgbClr val="4a7480"/>
+                </a:solidFill>
+                <a:latin typeface="Calibri"/>
+              </a:rPr>
+              <a:t>Fusionne les champs fournis avec _source existant</a:t>
+            </a:r>
+            <a:endParaRPr b="0" lang="fr-FR" sz="900" spc="-1" strike="noStrike">
+              <a:solidFill>
+                <a:srgbClr val="000000"/>
+              </a:solidFill>
+              <a:latin typeface="Arial"/>
+            </a:endParaRPr>
+          </a:p>
+        </p:txBody>
+      </p:sp>
+      <p:sp>
+        <p:nvSpPr>
+          <p:cNvPr id="100" name="Shape 528"/>
+          <p:cNvSpPr/>
+          <p:nvPr/>
+        </p:nvSpPr>
+        <p:spPr>
+          <a:xfrm>
+            <a:off x="274320" y="4462200"/>
+            <a:ext cx="8593560" cy="409680"/>
           </a:xfrm>
           <a:prstGeom prst="rect">
             <a:avLst/>
@@ -5240,14 +6470,14 @@
       </p:sp>
       <p:sp>
         <p:nvSpPr>
-          <p:cNvPr id="79" name="Text 487"/>
-          <p:cNvSpPr/>
-          <p:nvPr/>
-        </p:nvSpPr>
-        <p:spPr>
-          <a:xfrm>
-            <a:off x="274320" y="2359080"/>
-            <a:ext cx="1004760" cy="529200"/>
+          <p:cNvPr id="101" name="Text 499"/>
+          <p:cNvSpPr/>
+          <p:nvPr/>
+        </p:nvSpPr>
+        <p:spPr>
+          <a:xfrm>
+            <a:off x="365760" y="4462200"/>
+            <a:ext cx="8410680" cy="409680"/>
           </a:xfrm>
           <a:prstGeom prst="rect">
             <a:avLst/>
@@ -5264,11 +6494,11 @@
           <a:fontRef idx="minor"/>
         </p:style>
         <p:txBody>
-          <a:bodyPr lIns="0" rIns="0" tIns="0" bIns="0" anchor="ctr">
-            <a:noAutofit/>
-          </a:bodyPr>
-          <a:p>
-            <a:pPr algn="ctr" defTabSz="914400">
+          <a:bodyPr lIns="90000" rIns="90000" tIns="45000" bIns="45000" anchor="ctr">
+            <a:noAutofit/>
+          </a:bodyPr>
+          <a:p>
+            <a:pPr defTabSz="914400">
               <a:lnSpc>
                 <a:spcPct val="100000"/>
               </a:lnSpc>
@@ -5277,1137 +6507,21 @@
               </a:tabLst>
             </a:pPr>
             <a:r>
-              <a:rPr b="1" lang="en-US" sz="1000" spc="-1" strike="noStrike">
+              <a:rPr b="0" lang="en-US" sz="950" spc="-1" strike="noStrike">
                 <a:solidFill>
                   <a:srgbClr val="ffffff"/>
                 </a:solidFill>
                 <a:latin typeface="Calibri"/>
               </a:rPr>
-              <a:t>GET</a:t>
-            </a:r>
-            <a:endParaRPr b="0" lang="fr-FR" sz="1000" spc="-1" strike="noStrike">
-              <a:solidFill>
-                <a:srgbClr val="000000"/>
-              </a:solidFill>
-              <a:latin typeface="Arial"/>
-            </a:endParaRPr>
-          </a:p>
-        </p:txBody>
-      </p:sp>
-      <p:sp>
-        <p:nvSpPr>
-          <p:cNvPr id="80" name="Shape 520"/>
-          <p:cNvSpPr/>
-          <p:nvPr/>
-        </p:nvSpPr>
-        <p:spPr>
-          <a:xfrm>
-            <a:off x="1325880" y="2359080"/>
-            <a:ext cx="2010600" cy="529200"/>
-          </a:xfrm>
-          <a:prstGeom prst="rect">
-            <a:avLst/>
-          </a:prstGeom>
-          <a:solidFill>
-            <a:srgbClr val="f5f9fa"/>
-          </a:solidFill>
-          <a:ln w="12700">
-            <a:solidFill>
-              <a:srgbClr val="eaf4f6"/>
-            </a:solidFill>
-            <a:round/>
-          </a:ln>
-        </p:spPr>
-        <p:style>
-          <a:lnRef idx="0"/>
-          <a:fillRef idx="0"/>
-          <a:effectRef idx="0"/>
-          <a:fontRef idx="minor"/>
-        </p:style>
-        <p:txBody>
-          <a:bodyPr lIns="90000" rIns="90000" tIns="45000" bIns="45000" anchor="t">
-            <a:noAutofit/>
-          </a:bodyPr>
-          <a:p>
-            <a:pPr>
-              <a:lnSpc>
-                <a:spcPct val="100000"/>
-              </a:lnSpc>
-            </a:pPr>
-            <a:endParaRPr b="0" lang="fr-FR" sz="1800" spc="-1" strike="noStrike">
-              <a:solidFill>
-                <a:srgbClr val="000000"/>
-              </a:solidFill>
-              <a:latin typeface="Arial"/>
-            </a:endParaRPr>
-          </a:p>
-        </p:txBody>
-      </p:sp>
-      <p:sp>
-        <p:nvSpPr>
-          <p:cNvPr id="81" name="Text 488"/>
-          <p:cNvSpPr/>
-          <p:nvPr/>
-        </p:nvSpPr>
-        <p:spPr>
-          <a:xfrm>
-            <a:off x="1371600" y="2359080"/>
-            <a:ext cx="1919160" cy="529200"/>
-          </a:xfrm>
-          <a:prstGeom prst="rect">
-            <a:avLst/>
-          </a:prstGeom>
-          <a:noFill/>
-          <a:ln w="0">
-            <a:noFill/>
-          </a:ln>
-        </p:spPr>
-        <p:style>
-          <a:lnRef idx="0"/>
-          <a:fillRef idx="0"/>
-          <a:effectRef idx="0"/>
-          <a:fontRef idx="minor"/>
-        </p:style>
-        <p:txBody>
-          <a:bodyPr lIns="90000" rIns="90000" tIns="45000" bIns="45000" anchor="ctr">
-            <a:noAutofit/>
-          </a:bodyPr>
-          <a:p>
-            <a:pPr defTabSz="914400">
-              <a:lnSpc>
-                <a:spcPct val="100000"/>
-              </a:lnSpc>
-              <a:tabLst>
-                <a:tab algn="l" pos="0"/>
-              </a:tabLst>
-            </a:pPr>
-            <a:r>
-              <a:rPr b="1" lang="en-US" sz="1000" spc="-1" strike="noStrike">
-                <a:solidFill>
-                  <a:srgbClr val="00576b"/>
+              <a:t>⚡  </a:t>
+            </a:r>
+            <a:r>
+              <a:rPr b="0" lang="en-US" sz="950" spc="-1" strike="noStrike">
+                <a:solidFill>
+                  <a:srgbClr val="ffffff"/>
                 </a:solidFill>
                 <a:latin typeface="Calibri"/>
               </a:rPr>
-              <a:t>Récupérer</a:t>
-            </a:r>
-            <a:endParaRPr b="0" lang="fr-FR" sz="1000" spc="-1" strike="noStrike">
-              <a:solidFill>
-                <a:srgbClr val="000000"/>
-              </a:solidFill>
-              <a:latin typeface="Arial"/>
-            </a:endParaRPr>
-          </a:p>
-        </p:txBody>
-      </p:sp>
-      <p:sp>
-        <p:nvSpPr>
-          <p:cNvPr id="82" name="Shape 521"/>
-          <p:cNvSpPr/>
-          <p:nvPr/>
-        </p:nvSpPr>
-        <p:spPr>
-          <a:xfrm>
-            <a:off x="3383280" y="2359080"/>
-            <a:ext cx="2467800" cy="529200"/>
-          </a:xfrm>
-          <a:prstGeom prst="rect">
-            <a:avLst/>
-          </a:prstGeom>
-          <a:solidFill>
-            <a:srgbClr val="1a2b2f"/>
-          </a:solidFill>
-          <a:ln w="12700">
-            <a:solidFill>
-              <a:srgbClr val="1a2b2f"/>
-            </a:solidFill>
-            <a:round/>
-          </a:ln>
-        </p:spPr>
-        <p:style>
-          <a:lnRef idx="0"/>
-          <a:fillRef idx="0"/>
-          <a:effectRef idx="0"/>
-          <a:fontRef idx="minor"/>
-        </p:style>
-        <p:txBody>
-          <a:bodyPr lIns="90000" rIns="90000" tIns="45000" bIns="45000" anchor="t">
-            <a:noAutofit/>
-          </a:bodyPr>
-          <a:p>
-            <a:pPr>
-              <a:lnSpc>
-                <a:spcPct val="100000"/>
-              </a:lnSpc>
-            </a:pPr>
-            <a:endParaRPr b="0" lang="fr-FR" sz="1800" spc="-1" strike="noStrike">
-              <a:solidFill>
-                <a:srgbClr val="ffffff"/>
-              </a:solidFill>
-              <a:latin typeface="Arial"/>
-            </a:endParaRPr>
-          </a:p>
-        </p:txBody>
-      </p:sp>
-      <p:sp>
-        <p:nvSpPr>
-          <p:cNvPr id="83" name="Text 489"/>
-          <p:cNvSpPr/>
-          <p:nvPr/>
-        </p:nvSpPr>
-        <p:spPr>
-          <a:xfrm>
-            <a:off x="3429000" y="2359080"/>
-            <a:ext cx="2376360" cy="529200"/>
-          </a:xfrm>
-          <a:prstGeom prst="rect">
-            <a:avLst/>
-          </a:prstGeom>
-          <a:noFill/>
-          <a:ln w="0">
-            <a:noFill/>
-          </a:ln>
-        </p:spPr>
-        <p:style>
-          <a:lnRef idx="0"/>
-          <a:fillRef idx="0"/>
-          <a:effectRef idx="0"/>
-          <a:fontRef idx="minor"/>
-        </p:style>
-        <p:txBody>
-          <a:bodyPr lIns="90000" rIns="90000" tIns="45000" bIns="45000" anchor="ctr">
-            <a:noAutofit/>
-          </a:bodyPr>
-          <a:p>
-            <a:pPr defTabSz="914400">
-              <a:lnSpc>
-                <a:spcPct val="100000"/>
-              </a:lnSpc>
-              <a:tabLst>
-                <a:tab algn="l" pos="0"/>
-              </a:tabLst>
-            </a:pPr>
-            <a:r>
-              <a:rPr b="0" lang="en-US" sz="850" spc="-1" strike="noStrike">
-                <a:solidFill>
-                  <a:srgbClr val="a8d4dc"/>
-                </a:solidFill>
-                <a:latin typeface="Consolas"/>
-                <a:ea typeface="Consolas"/>
-              </a:rPr>
-              <a:t>GET /mon-index/_doc/{id}</a:t>
-            </a:r>
-            <a:endParaRPr b="0" lang="fr-FR" sz="850" spc="-1" strike="noStrike">
-              <a:solidFill>
-                <a:srgbClr val="000000"/>
-              </a:solidFill>
-              <a:latin typeface="Arial"/>
-            </a:endParaRPr>
-          </a:p>
-        </p:txBody>
-      </p:sp>
-      <p:sp>
-        <p:nvSpPr>
-          <p:cNvPr id="84" name="Text 490"/>
-          <p:cNvSpPr/>
-          <p:nvPr/>
-        </p:nvSpPr>
-        <p:spPr>
-          <a:xfrm>
-            <a:off x="5943600" y="2359080"/>
-            <a:ext cx="2925000" cy="529200"/>
-          </a:xfrm>
-          <a:prstGeom prst="rect">
-            <a:avLst/>
-          </a:prstGeom>
-          <a:noFill/>
-          <a:ln w="0">
-            <a:noFill/>
-          </a:ln>
-        </p:spPr>
-        <p:style>
-          <a:lnRef idx="0"/>
-          <a:fillRef idx="0"/>
-          <a:effectRef idx="0"/>
-          <a:fontRef idx="minor"/>
-        </p:style>
-        <p:txBody>
-          <a:bodyPr lIns="90000" rIns="90000" tIns="45000" bIns="45000" anchor="ctr">
-            <a:noAutofit/>
-          </a:bodyPr>
-          <a:p>
-            <a:pPr defTabSz="914400">
-              <a:lnSpc>
-                <a:spcPct val="100000"/>
-              </a:lnSpc>
-              <a:tabLst>
-                <a:tab algn="l" pos="0"/>
-              </a:tabLst>
-            </a:pPr>
-            <a:r>
-              <a:rPr b="0" i="1" lang="en-US" sz="900" spc="-1" strike="noStrike">
-                <a:solidFill>
-                  <a:srgbClr val="4a7480"/>
-                </a:solidFill>
-                <a:latin typeface="Calibri"/>
-              </a:rPr>
-              <a:t>Retourne _index, _id, _version, _source</a:t>
-            </a:r>
-            <a:endParaRPr b="0" lang="fr-FR" sz="900" spc="-1" strike="noStrike">
-              <a:solidFill>
-                <a:srgbClr val="000000"/>
-              </a:solidFill>
-              <a:latin typeface="Arial"/>
-            </a:endParaRPr>
-          </a:p>
-        </p:txBody>
-      </p:sp>
-      <p:sp>
-        <p:nvSpPr>
-          <p:cNvPr id="85" name="Shape 522"/>
-          <p:cNvSpPr/>
-          <p:nvPr/>
-        </p:nvSpPr>
-        <p:spPr>
-          <a:xfrm>
-            <a:off x="274320" y="3044880"/>
-            <a:ext cx="1004760" cy="529200"/>
-          </a:xfrm>
-          <a:prstGeom prst="rect">
-            <a:avLst/>
-          </a:prstGeom>
-          <a:solidFill>
-            <a:srgbClr val="ef4444"/>
-          </a:solidFill>
-          <a:ln w="12700">
-            <a:solidFill>
-              <a:srgbClr val="ef4444"/>
-            </a:solidFill>
-            <a:round/>
-          </a:ln>
-        </p:spPr>
-        <p:style>
-          <a:lnRef idx="0"/>
-          <a:fillRef idx="0"/>
-          <a:effectRef idx="0"/>
-          <a:fontRef idx="minor"/>
-        </p:style>
-        <p:txBody>
-          <a:bodyPr lIns="90000" rIns="90000" tIns="45000" bIns="45000" anchor="t">
-            <a:noAutofit/>
-          </a:bodyPr>
-          <a:p>
-            <a:pPr>
-              <a:lnSpc>
-                <a:spcPct val="100000"/>
-              </a:lnSpc>
-            </a:pPr>
-            <a:endParaRPr b="0" lang="fr-FR" sz="1800" spc="-1" strike="noStrike">
-              <a:solidFill>
-                <a:srgbClr val="ffffff"/>
-              </a:solidFill>
-              <a:latin typeface="Arial"/>
-            </a:endParaRPr>
-          </a:p>
-        </p:txBody>
-      </p:sp>
-      <p:sp>
-        <p:nvSpPr>
-          <p:cNvPr id="86" name="Text 491"/>
-          <p:cNvSpPr/>
-          <p:nvPr/>
-        </p:nvSpPr>
-        <p:spPr>
-          <a:xfrm>
-            <a:off x="274320" y="3044880"/>
-            <a:ext cx="1004760" cy="529200"/>
-          </a:xfrm>
-          <a:prstGeom prst="rect">
-            <a:avLst/>
-          </a:prstGeom>
-          <a:noFill/>
-          <a:ln w="0">
-            <a:noFill/>
-          </a:ln>
-        </p:spPr>
-        <p:style>
-          <a:lnRef idx="0"/>
-          <a:fillRef idx="0"/>
-          <a:effectRef idx="0"/>
-          <a:fontRef idx="minor"/>
-        </p:style>
-        <p:txBody>
-          <a:bodyPr lIns="0" rIns="0" tIns="0" bIns="0" anchor="ctr">
-            <a:noAutofit/>
-          </a:bodyPr>
-          <a:p>
-            <a:pPr algn="ctr" defTabSz="914400">
-              <a:lnSpc>
-                <a:spcPct val="100000"/>
-              </a:lnSpc>
-              <a:tabLst>
-                <a:tab algn="l" pos="0"/>
-              </a:tabLst>
-            </a:pPr>
-            <a:r>
-              <a:rPr b="1" lang="en-US" sz="1000" spc="-1" strike="noStrike">
-                <a:solidFill>
-                  <a:srgbClr val="ffffff"/>
-                </a:solidFill>
-                <a:latin typeface="Calibri"/>
-              </a:rPr>
-              <a:t>DELETE</a:t>
-            </a:r>
-            <a:endParaRPr b="0" lang="fr-FR" sz="1000" spc="-1" strike="noStrike">
-              <a:solidFill>
-                <a:srgbClr val="000000"/>
-              </a:solidFill>
-              <a:latin typeface="Arial"/>
-            </a:endParaRPr>
-          </a:p>
-        </p:txBody>
-      </p:sp>
-      <p:sp>
-        <p:nvSpPr>
-          <p:cNvPr id="87" name="Shape 523"/>
-          <p:cNvSpPr/>
-          <p:nvPr/>
-        </p:nvSpPr>
-        <p:spPr>
-          <a:xfrm>
-            <a:off x="1325880" y="3044880"/>
-            <a:ext cx="2010600" cy="529200"/>
-          </a:xfrm>
-          <a:prstGeom prst="rect">
-            <a:avLst/>
-          </a:prstGeom>
-          <a:solidFill>
-            <a:srgbClr val="f5f9fa"/>
-          </a:solidFill>
-          <a:ln w="12700">
-            <a:solidFill>
-              <a:srgbClr val="eaf4f6"/>
-            </a:solidFill>
-            <a:round/>
-          </a:ln>
-        </p:spPr>
-        <p:style>
-          <a:lnRef idx="0"/>
-          <a:fillRef idx="0"/>
-          <a:effectRef idx="0"/>
-          <a:fontRef idx="minor"/>
-        </p:style>
-        <p:txBody>
-          <a:bodyPr lIns="90000" rIns="90000" tIns="45000" bIns="45000" anchor="t">
-            <a:noAutofit/>
-          </a:bodyPr>
-          <a:p>
-            <a:pPr>
-              <a:lnSpc>
-                <a:spcPct val="100000"/>
-              </a:lnSpc>
-            </a:pPr>
-            <a:endParaRPr b="0" lang="fr-FR" sz="1800" spc="-1" strike="noStrike">
-              <a:solidFill>
-                <a:srgbClr val="000000"/>
-              </a:solidFill>
-              <a:latin typeface="Arial"/>
-            </a:endParaRPr>
-          </a:p>
-        </p:txBody>
-      </p:sp>
-      <p:sp>
-        <p:nvSpPr>
-          <p:cNvPr id="88" name="Text 492"/>
-          <p:cNvSpPr/>
-          <p:nvPr/>
-        </p:nvSpPr>
-        <p:spPr>
-          <a:xfrm>
-            <a:off x="1371600" y="3044880"/>
-            <a:ext cx="1919160" cy="529200"/>
-          </a:xfrm>
-          <a:prstGeom prst="rect">
-            <a:avLst/>
-          </a:prstGeom>
-          <a:noFill/>
-          <a:ln w="0">
-            <a:noFill/>
-          </a:ln>
-        </p:spPr>
-        <p:style>
-          <a:lnRef idx="0"/>
-          <a:fillRef idx="0"/>
-          <a:effectRef idx="0"/>
-          <a:fontRef idx="minor"/>
-        </p:style>
-        <p:txBody>
-          <a:bodyPr lIns="90000" rIns="90000" tIns="45000" bIns="45000" anchor="ctr">
-            <a:noAutofit/>
-          </a:bodyPr>
-          <a:p>
-            <a:pPr defTabSz="914400">
-              <a:lnSpc>
-                <a:spcPct val="100000"/>
-              </a:lnSpc>
-              <a:tabLst>
-                <a:tab algn="l" pos="0"/>
-              </a:tabLst>
-            </a:pPr>
-            <a:r>
-              <a:rPr b="1" lang="en-US" sz="1000" spc="-1" strike="noStrike">
-                <a:solidFill>
-                  <a:srgbClr val="ef4444"/>
-                </a:solidFill>
-                <a:latin typeface="Calibri"/>
-              </a:rPr>
-              <a:t>Supprimer</a:t>
-            </a:r>
-            <a:endParaRPr b="0" lang="fr-FR" sz="1000" spc="-1" strike="noStrike">
-              <a:solidFill>
-                <a:srgbClr val="000000"/>
-              </a:solidFill>
-              <a:latin typeface="Arial"/>
-            </a:endParaRPr>
-          </a:p>
-        </p:txBody>
-      </p:sp>
-      <p:sp>
-        <p:nvSpPr>
-          <p:cNvPr id="89" name="Shape 524"/>
-          <p:cNvSpPr/>
-          <p:nvPr/>
-        </p:nvSpPr>
-        <p:spPr>
-          <a:xfrm>
-            <a:off x="3383280" y="3044880"/>
-            <a:ext cx="2467800" cy="529200"/>
-          </a:xfrm>
-          <a:prstGeom prst="rect">
-            <a:avLst/>
-          </a:prstGeom>
-          <a:solidFill>
-            <a:srgbClr val="1a2b2f"/>
-          </a:solidFill>
-          <a:ln w="12700">
-            <a:solidFill>
-              <a:srgbClr val="1a2b2f"/>
-            </a:solidFill>
-            <a:round/>
-          </a:ln>
-        </p:spPr>
-        <p:style>
-          <a:lnRef idx="0"/>
-          <a:fillRef idx="0"/>
-          <a:effectRef idx="0"/>
-          <a:fontRef idx="minor"/>
-        </p:style>
-        <p:txBody>
-          <a:bodyPr lIns="90000" rIns="90000" tIns="45000" bIns="45000" anchor="t">
-            <a:noAutofit/>
-          </a:bodyPr>
-          <a:p>
-            <a:pPr>
-              <a:lnSpc>
-                <a:spcPct val="100000"/>
-              </a:lnSpc>
-            </a:pPr>
-            <a:endParaRPr b="0" lang="fr-FR" sz="1800" spc="-1" strike="noStrike">
-              <a:solidFill>
-                <a:srgbClr val="ffffff"/>
-              </a:solidFill>
-              <a:latin typeface="Arial"/>
-            </a:endParaRPr>
-          </a:p>
-        </p:txBody>
-      </p:sp>
-      <p:sp>
-        <p:nvSpPr>
-          <p:cNvPr id="90" name="Text 493"/>
-          <p:cNvSpPr/>
-          <p:nvPr/>
-        </p:nvSpPr>
-        <p:spPr>
-          <a:xfrm>
-            <a:off x="3429000" y="3044880"/>
-            <a:ext cx="2376360" cy="529200"/>
-          </a:xfrm>
-          <a:prstGeom prst="rect">
-            <a:avLst/>
-          </a:prstGeom>
-          <a:noFill/>
-          <a:ln w="0">
-            <a:noFill/>
-          </a:ln>
-        </p:spPr>
-        <p:style>
-          <a:lnRef idx="0"/>
-          <a:fillRef idx="0"/>
-          <a:effectRef idx="0"/>
-          <a:fontRef idx="minor"/>
-        </p:style>
-        <p:txBody>
-          <a:bodyPr lIns="90000" rIns="90000" tIns="45000" bIns="45000" anchor="ctr">
-            <a:noAutofit/>
-          </a:bodyPr>
-          <a:p>
-            <a:pPr defTabSz="914400">
-              <a:lnSpc>
-                <a:spcPct val="100000"/>
-              </a:lnSpc>
-              <a:tabLst>
-                <a:tab algn="l" pos="0"/>
-              </a:tabLst>
-            </a:pPr>
-            <a:r>
-              <a:rPr b="0" lang="en-US" sz="850" spc="-1" strike="noStrike">
-                <a:solidFill>
-                  <a:srgbClr val="a8d4dc"/>
-                </a:solidFill>
-                <a:latin typeface="Consolas"/>
-                <a:ea typeface="Consolas"/>
-              </a:rPr>
-              <a:t>DELETE /mon-index/_doc/{id}</a:t>
-            </a:r>
-            <a:endParaRPr b="0" lang="fr-FR" sz="850" spc="-1" strike="noStrike">
-              <a:solidFill>
-                <a:srgbClr val="000000"/>
-              </a:solidFill>
-              <a:latin typeface="Arial"/>
-            </a:endParaRPr>
-          </a:p>
-        </p:txBody>
-      </p:sp>
-      <p:sp>
-        <p:nvSpPr>
-          <p:cNvPr id="91" name="Text 494"/>
-          <p:cNvSpPr/>
-          <p:nvPr/>
-        </p:nvSpPr>
-        <p:spPr>
-          <a:xfrm>
-            <a:off x="5943600" y="3044880"/>
-            <a:ext cx="2925000" cy="529200"/>
-          </a:xfrm>
-          <a:prstGeom prst="rect">
-            <a:avLst/>
-          </a:prstGeom>
-          <a:noFill/>
-          <a:ln w="0">
-            <a:noFill/>
-          </a:ln>
-        </p:spPr>
-        <p:style>
-          <a:lnRef idx="0"/>
-          <a:fillRef idx="0"/>
-          <a:effectRef idx="0"/>
-          <a:fontRef idx="minor"/>
-        </p:style>
-        <p:txBody>
-          <a:bodyPr lIns="90000" rIns="90000" tIns="45000" bIns="45000" anchor="ctr">
-            <a:noAutofit/>
-          </a:bodyPr>
-          <a:p>
-            <a:pPr defTabSz="914400">
-              <a:lnSpc>
-                <a:spcPct val="100000"/>
-              </a:lnSpc>
-              <a:tabLst>
-                <a:tab algn="l" pos="0"/>
-              </a:tabLst>
-            </a:pPr>
-            <a:r>
-              <a:rPr b="0" i="1" lang="en-US" sz="900" spc="-1" strike="noStrike">
-                <a:solidFill>
-                  <a:srgbClr val="4a7480"/>
-                </a:solidFill>
-                <a:latin typeface="Calibri"/>
-              </a:rPr>
-              <a:t>Suppression asynchrone — répliques supprimées en batch</a:t>
-            </a:r>
-            <a:endParaRPr b="0" lang="fr-FR" sz="900" spc="-1" strike="noStrike">
-              <a:solidFill>
-                <a:srgbClr val="000000"/>
-              </a:solidFill>
-              <a:latin typeface="Arial"/>
-            </a:endParaRPr>
-          </a:p>
-        </p:txBody>
-      </p:sp>
-      <p:sp>
-        <p:nvSpPr>
-          <p:cNvPr id="92" name="Shape 525"/>
-          <p:cNvSpPr/>
-          <p:nvPr/>
-        </p:nvSpPr>
-        <p:spPr>
-          <a:xfrm>
-            <a:off x="274320" y="3730680"/>
-            <a:ext cx="1004760" cy="529200"/>
-          </a:xfrm>
-          <a:prstGeom prst="rect">
-            <a:avLst/>
-          </a:prstGeom>
-          <a:solidFill>
-            <a:srgbClr val="e8834a"/>
-          </a:solidFill>
-          <a:ln w="12700">
-            <a:solidFill>
-              <a:srgbClr val="e8834a"/>
-            </a:solidFill>
-            <a:round/>
-          </a:ln>
-        </p:spPr>
-        <p:style>
-          <a:lnRef idx="0"/>
-          <a:fillRef idx="0"/>
-          <a:effectRef idx="0"/>
-          <a:fontRef idx="minor"/>
-        </p:style>
-        <p:txBody>
-          <a:bodyPr lIns="90000" rIns="90000" tIns="45000" bIns="45000" anchor="t">
-            <a:noAutofit/>
-          </a:bodyPr>
-          <a:p>
-            <a:pPr>
-              <a:lnSpc>
-                <a:spcPct val="100000"/>
-              </a:lnSpc>
-            </a:pPr>
-            <a:endParaRPr b="0" lang="fr-FR" sz="1800" spc="-1" strike="noStrike">
-              <a:solidFill>
-                <a:srgbClr val="000000"/>
-              </a:solidFill>
-              <a:latin typeface="Arial"/>
-            </a:endParaRPr>
-          </a:p>
-        </p:txBody>
-      </p:sp>
-      <p:sp>
-        <p:nvSpPr>
-          <p:cNvPr id="93" name="Text 495"/>
-          <p:cNvSpPr/>
-          <p:nvPr/>
-        </p:nvSpPr>
-        <p:spPr>
-          <a:xfrm>
-            <a:off x="274320" y="3730680"/>
-            <a:ext cx="1004760" cy="529200"/>
-          </a:xfrm>
-          <a:prstGeom prst="rect">
-            <a:avLst/>
-          </a:prstGeom>
-          <a:noFill/>
-          <a:ln w="0">
-            <a:noFill/>
-          </a:ln>
-        </p:spPr>
-        <p:style>
-          <a:lnRef idx="0"/>
-          <a:fillRef idx="0"/>
-          <a:effectRef idx="0"/>
-          <a:fontRef idx="minor"/>
-        </p:style>
-        <p:txBody>
-          <a:bodyPr lIns="0" rIns="0" tIns="0" bIns="0" anchor="ctr">
-            <a:noAutofit/>
-          </a:bodyPr>
-          <a:p>
-            <a:pPr algn="ctr" defTabSz="914400">
-              <a:lnSpc>
-                <a:spcPct val="100000"/>
-              </a:lnSpc>
-              <a:tabLst>
-                <a:tab algn="l" pos="0"/>
-              </a:tabLst>
-            </a:pPr>
-            <a:r>
-              <a:rPr b="1" lang="en-US" sz="1000" spc="-1" strike="noStrike">
-                <a:solidFill>
-                  <a:srgbClr val="ffffff"/>
-                </a:solidFill>
-                <a:latin typeface="Calibri"/>
-              </a:rPr>
-              <a:t>POST</a:t>
-            </a:r>
-            <a:endParaRPr b="0" lang="fr-FR" sz="1000" spc="-1" strike="noStrike">
-              <a:solidFill>
-                <a:srgbClr val="000000"/>
-              </a:solidFill>
-              <a:latin typeface="Arial"/>
-            </a:endParaRPr>
-          </a:p>
-        </p:txBody>
-      </p:sp>
-      <p:sp>
-        <p:nvSpPr>
-          <p:cNvPr id="94" name="Shape 526"/>
-          <p:cNvSpPr/>
-          <p:nvPr/>
-        </p:nvSpPr>
-        <p:spPr>
-          <a:xfrm>
-            <a:off x="1325880" y="3730680"/>
-            <a:ext cx="2010600" cy="529200"/>
-          </a:xfrm>
-          <a:prstGeom prst="rect">
-            <a:avLst/>
-          </a:prstGeom>
-          <a:solidFill>
-            <a:srgbClr val="f5f9fa"/>
-          </a:solidFill>
-          <a:ln w="12700">
-            <a:solidFill>
-              <a:srgbClr val="eaf4f6"/>
-            </a:solidFill>
-            <a:round/>
-          </a:ln>
-        </p:spPr>
-        <p:style>
-          <a:lnRef idx="0"/>
-          <a:fillRef idx="0"/>
-          <a:effectRef idx="0"/>
-          <a:fontRef idx="minor"/>
-        </p:style>
-        <p:txBody>
-          <a:bodyPr lIns="90000" rIns="90000" tIns="45000" bIns="45000" anchor="t">
-            <a:noAutofit/>
-          </a:bodyPr>
-          <a:p>
-            <a:pPr>
-              <a:lnSpc>
-                <a:spcPct val="100000"/>
-              </a:lnSpc>
-            </a:pPr>
-            <a:endParaRPr b="0" lang="fr-FR" sz="1800" spc="-1" strike="noStrike">
-              <a:solidFill>
-                <a:srgbClr val="000000"/>
-              </a:solidFill>
-              <a:latin typeface="Arial"/>
-            </a:endParaRPr>
-          </a:p>
-        </p:txBody>
-      </p:sp>
-      <p:sp>
-        <p:nvSpPr>
-          <p:cNvPr id="95" name="Text 496"/>
-          <p:cNvSpPr/>
-          <p:nvPr/>
-        </p:nvSpPr>
-        <p:spPr>
-          <a:xfrm>
-            <a:off x="1371600" y="3730680"/>
-            <a:ext cx="1919160" cy="529200"/>
-          </a:xfrm>
-          <a:prstGeom prst="rect">
-            <a:avLst/>
-          </a:prstGeom>
-          <a:noFill/>
-          <a:ln w="0">
-            <a:noFill/>
-          </a:ln>
-        </p:spPr>
-        <p:style>
-          <a:lnRef idx="0"/>
-          <a:fillRef idx="0"/>
-          <a:effectRef idx="0"/>
-          <a:fontRef idx="minor"/>
-        </p:style>
-        <p:txBody>
-          <a:bodyPr lIns="90000" rIns="90000" tIns="45000" bIns="45000" anchor="ctr">
-            <a:noAutofit/>
-          </a:bodyPr>
-          <a:p>
-            <a:pPr defTabSz="914400">
-              <a:lnSpc>
-                <a:spcPct val="100000"/>
-              </a:lnSpc>
-              <a:tabLst>
-                <a:tab algn="l" pos="0"/>
-              </a:tabLst>
-            </a:pPr>
-            <a:r>
-              <a:rPr b="1" lang="en-US" sz="1000" spc="-1" strike="noStrike">
-                <a:solidFill>
-                  <a:srgbClr val="e8834a"/>
-                </a:solidFill>
-                <a:latin typeface="Calibri"/>
-              </a:rPr>
-              <a:t>Mise à jour partielle</a:t>
-            </a:r>
-            <a:endParaRPr b="0" lang="fr-FR" sz="1000" spc="-1" strike="noStrike">
-              <a:solidFill>
-                <a:srgbClr val="000000"/>
-              </a:solidFill>
-              <a:latin typeface="Arial"/>
-            </a:endParaRPr>
-          </a:p>
-        </p:txBody>
-      </p:sp>
-      <p:sp>
-        <p:nvSpPr>
-          <p:cNvPr id="96" name="Shape 527"/>
-          <p:cNvSpPr/>
-          <p:nvPr/>
-        </p:nvSpPr>
-        <p:spPr>
-          <a:xfrm>
-            <a:off x="3383280" y="3730680"/>
-            <a:ext cx="2467800" cy="529200"/>
-          </a:xfrm>
-          <a:prstGeom prst="rect">
-            <a:avLst/>
-          </a:prstGeom>
-          <a:solidFill>
-            <a:srgbClr val="1a2b2f"/>
-          </a:solidFill>
-          <a:ln w="12700">
-            <a:solidFill>
-              <a:srgbClr val="1a2b2f"/>
-            </a:solidFill>
-            <a:round/>
-          </a:ln>
-        </p:spPr>
-        <p:style>
-          <a:lnRef idx="0"/>
-          <a:fillRef idx="0"/>
-          <a:effectRef idx="0"/>
-          <a:fontRef idx="minor"/>
-        </p:style>
-        <p:txBody>
-          <a:bodyPr lIns="90000" rIns="90000" tIns="45000" bIns="45000" anchor="t">
-            <a:noAutofit/>
-          </a:bodyPr>
-          <a:p>
-            <a:pPr>
-              <a:lnSpc>
-                <a:spcPct val="100000"/>
-              </a:lnSpc>
-            </a:pPr>
-            <a:endParaRPr b="0" lang="fr-FR" sz="1800" spc="-1" strike="noStrike">
-              <a:solidFill>
-                <a:srgbClr val="ffffff"/>
-              </a:solidFill>
-              <a:latin typeface="Arial"/>
-            </a:endParaRPr>
-          </a:p>
-        </p:txBody>
-      </p:sp>
-      <p:sp>
-        <p:nvSpPr>
-          <p:cNvPr id="97" name="Text 497"/>
-          <p:cNvSpPr/>
-          <p:nvPr/>
-        </p:nvSpPr>
-        <p:spPr>
-          <a:xfrm>
-            <a:off x="3429000" y="3730680"/>
-            <a:ext cx="2376360" cy="529200"/>
-          </a:xfrm>
-          <a:prstGeom prst="rect">
-            <a:avLst/>
-          </a:prstGeom>
-          <a:noFill/>
-          <a:ln w="0">
-            <a:noFill/>
-          </a:ln>
-        </p:spPr>
-        <p:style>
-          <a:lnRef idx="0"/>
-          <a:fillRef idx="0"/>
-          <a:effectRef idx="0"/>
-          <a:fontRef idx="minor"/>
-        </p:style>
-        <p:txBody>
-          <a:bodyPr lIns="90000" rIns="90000" tIns="45000" bIns="45000" anchor="ctr">
-            <a:noAutofit/>
-          </a:bodyPr>
-          <a:p>
-            <a:pPr defTabSz="914400">
-              <a:lnSpc>
-                <a:spcPct val="100000"/>
-              </a:lnSpc>
-              <a:tabLst>
-                <a:tab algn="l" pos="0"/>
-              </a:tabLst>
-            </a:pPr>
-            <a:r>
-              <a:rPr b="0" lang="en-US" sz="850" spc="-1" strike="noStrike">
-                <a:solidFill>
-                  <a:srgbClr val="a8d4dc"/>
-                </a:solidFill>
-                <a:latin typeface="Consolas"/>
-                <a:ea typeface="Consolas"/>
-              </a:rPr>
-              <a:t>POST /mon-index/_update/{id}</a:t>
-            </a:r>
-            <a:endParaRPr b="0" lang="fr-FR" sz="850" spc="-1" strike="noStrike">
-              <a:solidFill>
-                <a:srgbClr val="000000"/>
-              </a:solidFill>
-              <a:latin typeface="Arial"/>
-            </a:endParaRPr>
-          </a:p>
-        </p:txBody>
-      </p:sp>
-      <p:sp>
-        <p:nvSpPr>
-          <p:cNvPr id="98" name="Text 498"/>
-          <p:cNvSpPr/>
-          <p:nvPr/>
-        </p:nvSpPr>
-        <p:spPr>
-          <a:xfrm>
-            <a:off x="5943600" y="3730680"/>
-            <a:ext cx="2925000" cy="529200"/>
-          </a:xfrm>
-          <a:prstGeom prst="rect">
-            <a:avLst/>
-          </a:prstGeom>
-          <a:noFill/>
-          <a:ln w="0">
-            <a:noFill/>
-          </a:ln>
-        </p:spPr>
-        <p:style>
-          <a:lnRef idx="0"/>
-          <a:fillRef idx="0"/>
-          <a:effectRef idx="0"/>
-          <a:fontRef idx="minor"/>
-        </p:style>
-        <p:txBody>
-          <a:bodyPr lIns="90000" rIns="90000" tIns="45000" bIns="45000" anchor="ctr">
-            <a:noAutofit/>
-          </a:bodyPr>
-          <a:p>
-            <a:pPr defTabSz="914400">
-              <a:lnSpc>
-                <a:spcPct val="100000"/>
-              </a:lnSpc>
-              <a:tabLst>
-                <a:tab algn="l" pos="0"/>
-              </a:tabLst>
-            </a:pPr>
-            <a:r>
-              <a:rPr b="0" i="1" lang="en-US" sz="900" spc="-1" strike="noStrike">
-                <a:solidFill>
-                  <a:srgbClr val="4a7480"/>
-                </a:solidFill>
-                <a:latin typeface="Calibri"/>
-              </a:rPr>
-              <a:t>Fusionne les champs fournis avec _source existant</a:t>
-            </a:r>
-            <a:endParaRPr b="0" lang="fr-FR" sz="900" spc="-1" strike="noStrike">
-              <a:solidFill>
-                <a:srgbClr val="000000"/>
-              </a:solidFill>
-              <a:latin typeface="Arial"/>
-            </a:endParaRPr>
-          </a:p>
-        </p:txBody>
-      </p:sp>
-      <p:sp>
-        <p:nvSpPr>
-          <p:cNvPr id="99" name="Shape 528"/>
-          <p:cNvSpPr/>
-          <p:nvPr/>
-        </p:nvSpPr>
-        <p:spPr>
-          <a:xfrm>
-            <a:off x="274320" y="4462200"/>
-            <a:ext cx="8594280" cy="410400"/>
-          </a:xfrm>
-          <a:prstGeom prst="rect">
-            <a:avLst/>
-          </a:prstGeom>
-          <a:solidFill>
-            <a:srgbClr val="00576b"/>
-          </a:solidFill>
-          <a:ln w="12700">
-            <a:solidFill>
-              <a:srgbClr val="00576b"/>
-            </a:solidFill>
-            <a:round/>
-          </a:ln>
-        </p:spPr>
-        <p:style>
-          <a:lnRef idx="0"/>
-          <a:fillRef idx="0"/>
-          <a:effectRef idx="0"/>
-          <a:fontRef idx="minor"/>
-        </p:style>
-        <p:txBody>
-          <a:bodyPr lIns="90000" rIns="90000" tIns="45000" bIns="45000" anchor="t">
-            <a:noAutofit/>
-          </a:bodyPr>
-          <a:p>
-            <a:pPr>
-              <a:lnSpc>
-                <a:spcPct val="100000"/>
-              </a:lnSpc>
-            </a:pPr>
-            <a:endParaRPr b="0" lang="fr-FR" sz="1800" spc="-1" strike="noStrike">
-              <a:solidFill>
-                <a:srgbClr val="ffffff"/>
-              </a:solidFill>
-              <a:latin typeface="Arial"/>
-            </a:endParaRPr>
-          </a:p>
-        </p:txBody>
-      </p:sp>
-      <p:sp>
-        <p:nvSpPr>
-          <p:cNvPr id="100" name="Text 499"/>
-          <p:cNvSpPr/>
-          <p:nvPr/>
-        </p:nvSpPr>
-        <p:spPr>
-          <a:xfrm>
-            <a:off x="365760" y="4462200"/>
-            <a:ext cx="8411400" cy="410400"/>
-          </a:xfrm>
-          <a:prstGeom prst="rect">
-            <a:avLst/>
-          </a:prstGeom>
-          <a:noFill/>
-          <a:ln w="0">
-            <a:noFill/>
-          </a:ln>
-        </p:spPr>
-        <p:style>
-          <a:lnRef idx="0"/>
-          <a:fillRef idx="0"/>
-          <a:effectRef idx="0"/>
-          <a:fontRef idx="minor"/>
-        </p:style>
-        <p:txBody>
-          <a:bodyPr lIns="90000" rIns="90000" tIns="45000" bIns="45000" anchor="ctr">
-            <a:noAutofit/>
-          </a:bodyPr>
-          <a:p>
-            <a:pPr defTabSz="914400">
-              <a:lnSpc>
-                <a:spcPct val="100000"/>
-              </a:lnSpc>
-              <a:tabLst>
-                <a:tab algn="l" pos="0"/>
-              </a:tabLst>
-            </a:pPr>
-            <a:r>
-              <a:rPr b="0" lang="en-US" sz="950" spc="-1" strike="noStrike">
-                <a:solidFill>
-                  <a:srgbClr val="ffffff"/>
-                </a:solidFill>
-                <a:latin typeface="Calibri"/>
-              </a:rPr>
-              <a:t>⚡  </a:t>
-            </a:r>
-            <a:r>
-              <a:rPr b="0" lang="en-US" sz="950" spc="-1" strike="noStrike">
-                <a:solidFill>
-                  <a:srgbClr val="ffffff"/>
-                </a:solidFill>
-                <a:latin typeface="Calibri"/>
-              </a:rPr>
               <a:t>Bulk API : regrouper create / index / update / delete en une seule requête NDJSON  —  POST /mon-index/_bulk</a:t>
             </a:r>
             <a:endParaRPr b="0" lang="fr-FR" sz="950" spc="-1" strike="noStrike">
@@ -6421,14 +6535,14 @@
       </p:sp>
       <p:sp>
         <p:nvSpPr>
-          <p:cNvPr id="101" name="Shape 529"/>
+          <p:cNvPr id="102" name="Shape 529"/>
           <p:cNvSpPr/>
           <p:nvPr/>
         </p:nvSpPr>
         <p:spPr>
           <a:xfrm>
             <a:off x="274320" y="4526280"/>
-            <a:ext cx="8594280" cy="383040"/>
+            <a:ext cx="8593560" cy="382320"/>
           </a:xfrm>
           <a:prstGeom prst="rect">
             <a:avLst/>
@@ -6470,14 +6584,14 @@
       </p:sp>
       <p:sp>
         <p:nvSpPr>
-          <p:cNvPr id="102" name="Text 500"/>
+          <p:cNvPr id="103" name="Text 500"/>
           <p:cNvSpPr/>
           <p:nvPr/>
         </p:nvSpPr>
         <p:spPr>
           <a:xfrm>
             <a:off x="384120" y="4526280"/>
-            <a:ext cx="8411400" cy="383040"/>
+            <a:ext cx="8410680" cy="382320"/>
           </a:xfrm>
           <a:prstGeom prst="rect">
             <a:avLst/>
